--- a/src/data/pitch-templates/tsmc.pptx
+++ b/src/data/pitch-templates/tsmc.pptx
@@ -13,9 +13,10 @@
     <p:sldId id="261" r:id="rId7"/>
     <p:sldId id="262" r:id="rId8"/>
     <p:sldId id="263" r:id="rId9"/>
+    <p:sldId id="264" r:id="rId10"/>
   </p:sldIdLst>
   <p:notesMasterIdLst>
-    <p:notesMasterId r:id="rId10"/>
+    <p:notesMasterId r:id="rId11"/>
   </p:notesMasterIdLst>
   <p:sldSz cx="12192000" cy="6858000"/>
   <p:notesSz cx="6858000" cy="12192000"/>
@@ -1149,6 +1150,94 @@
             <a:fld id="{F7021451-1387-4CA6-816F-3879F97B5CBC}" type="slidenum">
               <a:rPr lang="en-US"/>
               <a:t>8</a:t>
+            </a:fld>
+            <a:endParaRPr lang="en-US"/>
+          </a:p>
+        </p:txBody>
+      </p:sp>
+    </p:spTree>
+    <p:extLst>
+      <p:ext uri="{BB962C8B-B14F-4D97-AF65-F5344CB8AC3E}">
+        <p14:creationId xmlns:p14="http://schemas.microsoft.com/office/powerpoint/2010/main" val="1024086991"/>
+      </p:ext>
+    </p:extLst>
+  </p:cSld>
+  <p:clrMapOvr>
+    <a:masterClrMapping/>
+  </p:clrMapOvr>
+</p:notes>
+</file>
+
+<file path=ppt/notesSlides/notesSlide9.xml><?xml version="1.0" encoding="utf-8"?>
+<p:notes xmlns:a="http://schemas.openxmlformats.org/drawingml/2006/main" xmlns:r="http://schemas.openxmlformats.org/officeDocument/2006/relationships" xmlns:p="http://schemas.openxmlformats.org/presentationml/2006/main">
+  <p:cSld>
+    <p:spTree>
+      <p:nvGrpSpPr>
+        <p:cNvPr id="1" name=""/>
+        <p:cNvGrpSpPr/>
+        <p:nvPr/>
+      </p:nvGrpSpPr>
+      <p:grpSpPr>
+        <a:xfrm>
+          <a:off x="0" y="0"/>
+          <a:ext cx="0" cy="0"/>
+          <a:chOff x="0" y="0"/>
+          <a:chExt cx="0" cy="0"/>
+        </a:xfrm>
+      </p:grpSpPr>
+      <p:sp>
+        <p:nvSpPr>
+          <p:cNvPr id="2" name="Slide Image Placeholder 1"/>
+          <p:cNvSpPr>
+            <a:spLocks noGrp="1" noRot="1" noChangeAspect="1"/>
+          </p:cNvSpPr>
+          <p:nvPr>
+            <p:ph type="sldImg"/>
+          </p:nvPr>
+        </p:nvSpPr>
+        <p:spPr/>
+      </p:sp>
+      <p:sp>
+        <p:nvSpPr>
+          <p:cNvPr id="3" name="Notes Placeholder 2"/>
+          <p:cNvSpPr>
+            <a:spLocks noGrp="1"/>
+          </p:cNvSpPr>
+          <p:nvPr>
+            <p:ph type="body" idx="1"/>
+          </p:nvPr>
+        </p:nvSpPr>
+        <p:spPr/>
+        <p:txBody>
+          <a:bodyPr/>
+          <a:lstStyle/>
+          <a:p>
+            <a:r>
+              <a:rPr lang="en-US" dirty="0"/>
+              <a:t/>
+            </a:r>
+            <a:endParaRPr lang="en-US" dirty="0"/>
+          </a:p>
+        </p:txBody>
+      </p:sp>
+      <p:sp>
+        <p:nvSpPr>
+          <p:cNvPr id="4" name="Slide Number Placeholder 3"/>
+          <p:cNvSpPr>
+            <a:spLocks noGrp="1"/>
+          </p:cNvSpPr>
+          <p:nvPr>
+            <p:ph type="sldNum" sz="quarter" idx="10"/>
+          </p:nvPr>
+        </p:nvSpPr>
+        <p:spPr/>
+        <p:txBody>
+          <a:bodyPr/>
+          <a:lstStyle/>
+          <a:p>
+            <a:fld id="{F7021451-1387-4CA6-816F-3879F97B5CBC}" type="slidenum">
+              <a:rPr lang="en-US"/>
+              <a:t>9</a:t>
             </a:fld>
             <a:endParaRPr lang="en-US"/>
           </a:p>
@@ -4138,10 +4227,11 @@
             <a:tbl>
               <a:tblPr/>
               <a:tblGrid>
-                <a:gridCol w="2811780"/>
-                <a:gridCol w="2811780"/>
-                <a:gridCol w="2811780"/>
-                <a:gridCol w="2811780"/>
+                <a:gridCol w="2249424"/>
+                <a:gridCol w="2249424"/>
+                <a:gridCol w="2249424"/>
+                <a:gridCol w="2249424"/>
+                <a:gridCol w="2249424"/>
               </a:tblGrid>
               <a:tr h="402336">
                 <a:tc>
@@ -4153,7 +4243,7 @@
                         <a:buNone/>
                       </a:pPr>
                       <a:r>
-                        <a:rPr lang="en-US" sz="1200" b="1" dirty="0">
+                        <a:rPr lang="en-US" sz="1100" b="1" dirty="0">
                           <a:solidFill>
                             <a:srgbClr val="FFFFFF"/>
                           </a:solidFill>
@@ -4163,7 +4253,7 @@
                         </a:rPr>
                         <a:t>Case</a:t>
                       </a:r>
-                      <a:endParaRPr lang="en-US" sz="1200" dirty="0">
+                      <a:endParaRPr lang="en-US" sz="1100" dirty="0">
                         <a:latin typeface="Calibri" charset="0"/>
                         <a:ea typeface="Calibri" charset="0"/>
                         <a:cs typeface="Calibri" charset="0"/>
@@ -4221,7 +4311,7 @@
                         <a:buNone/>
                       </a:pPr>
                       <a:r>
-                        <a:rPr lang="en-US" sz="1200" b="1" dirty="0">
+                        <a:rPr lang="en-US" sz="1100" b="1" dirty="0">
                           <a:solidFill>
                             <a:srgbClr val="FFFFFF"/>
                           </a:solidFill>
@@ -4231,7 +4321,7 @@
                         </a:rPr>
                         <a:t>Key Assumption Delta vs. Base</a:t>
                       </a:r>
-                      <a:endParaRPr lang="en-US" sz="1200" dirty="0">
+                      <a:endParaRPr lang="en-US" sz="1100" dirty="0">
                         <a:latin typeface="Calibri" charset="0"/>
                         <a:ea typeface="Calibri" charset="0"/>
                         <a:cs typeface="Calibri" charset="0"/>
@@ -4289,7 +4379,7 @@
                         <a:buNone/>
                       </a:pPr>
                       <a:r>
-                        <a:rPr lang="en-US" sz="1200" b="1" dirty="0">
+                        <a:rPr lang="en-US" sz="1100" b="1" dirty="0">
                           <a:solidFill>
                             <a:srgbClr val="FFFFFF"/>
                           </a:solidFill>
@@ -4299,7 +4389,7 @@
                         </a:rPr>
                         <a:t>Price Target</a:t>
                       </a:r>
-                      <a:endParaRPr lang="en-US" sz="1200" dirty="0">
+                      <a:endParaRPr lang="en-US" sz="1100" dirty="0">
                         <a:latin typeface="Calibri" charset="0"/>
                         <a:ea typeface="Calibri" charset="0"/>
                         <a:cs typeface="Calibri" charset="0"/>
@@ -4357,7 +4447,75 @@
                         <a:buNone/>
                       </a:pPr>
                       <a:r>
-                        <a:rPr lang="en-US" sz="1200" b="1" dirty="0">
+                        <a:rPr lang="en-US" sz="1100" b="1" dirty="0">
+                          <a:solidFill>
+                            <a:srgbClr val="FFFFFF"/>
+                          </a:solidFill>
+                          <a:latin typeface="Calibri" pitchFamily="34" charset="0"/>
+                          <a:ea typeface="Calibri" pitchFamily="34" charset="-122"/>
+                          <a:cs typeface="Calibri" pitchFamily="34" charset="-120"/>
+                        </a:rPr>
+                        <a:t>Upside/(Downside)</a:t>
+                      </a:r>
+                      <a:endParaRPr lang="en-US" sz="1100" dirty="0">
+                        <a:latin typeface="Calibri" charset="0"/>
+                        <a:ea typeface="Calibri" charset="0"/>
+                        <a:cs typeface="Calibri" charset="0"/>
+                      </a:endParaRPr>
+                    </a:p>
+                  </a:txBody>
+                  <a:tcPr marL="91440" marR="91440" marT="45720" marB="45720">
+                    <a:lnL w="12700" cap="flat" cmpd="sng" algn="ctr">
+                      <a:solidFill>
+                        <a:srgbClr val="E3E0D3"/>
+                      </a:solidFill>
+                      <a:prstDash val="solid"/>
+                      <a:round/>
+                      <a:headEnd type="none" w="med" len="med"/>
+                      <a:tailEnd type="none" w="med" len="med"/>
+                    </a:lnL>
+                    <a:lnR w="12700" cap="flat" cmpd="sng" algn="ctr">
+                      <a:solidFill>
+                        <a:srgbClr val="E3E0D3"/>
+                      </a:solidFill>
+                      <a:prstDash val="solid"/>
+                      <a:round/>
+                      <a:headEnd type="none" w="med" len="med"/>
+                      <a:tailEnd type="none" w="med" len="med"/>
+                    </a:lnR>
+                    <a:lnT w="12700" cap="flat" cmpd="sng" algn="ctr">
+                      <a:solidFill>
+                        <a:srgbClr val="E3E0D3"/>
+                      </a:solidFill>
+                      <a:prstDash val="solid"/>
+                      <a:round/>
+                      <a:headEnd type="none" w="med" len="med"/>
+                      <a:tailEnd type="none" w="med" len="med"/>
+                    </a:lnT>
+                    <a:lnB w="12700" cap="flat" cmpd="sng" algn="ctr">
+                      <a:solidFill>
+                        <a:srgbClr val="E3E0D3"/>
+                      </a:solidFill>
+                      <a:prstDash val="solid"/>
+                      <a:round/>
+                      <a:headEnd type="none" w="med" len="med"/>
+                      <a:tailEnd type="none" w="med" len="med"/>
+                    </a:lnB>
+                    <a:solidFill>
+                      <a:srgbClr val="26241F"/>
+                    </a:solidFill>
+                  </a:tcPr>
+                </a:tc>
+                <a:tc>
+                  <a:txBody>
+                    <a:bodyPr/>
+                    <a:lstStyle/>
+                    <a:p>
+                      <a:pPr indent="0" marL="0">
+                        <a:buNone/>
+                      </a:pPr>
+                      <a:r>
+                        <a:rPr lang="en-US" sz="1100" b="1" dirty="0">
                           <a:solidFill>
                             <a:srgbClr val="FFFFFF"/>
                           </a:solidFill>
@@ -4367,7 +4525,7 @@
                         </a:rPr>
                         <a:t>Weight</a:t>
                       </a:r>
-                      <a:endParaRPr lang="en-US" sz="1200" dirty="0">
+                      <a:endParaRPr lang="en-US" sz="1100" dirty="0">
                         <a:latin typeface="Calibri" charset="0"/>
                         <a:ea typeface="Calibri" charset="0"/>
                         <a:cs typeface="Calibri" charset="0"/>
@@ -4427,7 +4585,7 @@
                         <a:buNone/>
                       </a:pPr>
                       <a:r>
-                        <a:rPr lang="en-US" sz="1200" dirty="0">
+                        <a:rPr lang="en-US" sz="1100" dirty="0">
                           <a:solidFill>
                             <a:srgbClr val="26241F"/>
                           </a:solidFill>
@@ -4437,7 +4595,7 @@
                         </a:rPr>
                         <a:t>Bear</a:t>
                       </a:r>
-                      <a:endParaRPr lang="en-US" sz="1200" dirty="0">
+                      <a:endParaRPr lang="en-US" sz="1100" dirty="0">
                         <a:latin typeface="Calibri" charset="0"/>
                         <a:ea typeface="Calibri" charset="0"/>
                         <a:cs typeface="Calibri" charset="0"/>
@@ -4492,7 +4650,7 @@
                         <a:buNone/>
                       </a:pPr>
                       <a:r>
-                        <a:rPr lang="en-US" sz="1200" dirty="0">
+                        <a:rPr lang="en-US" sz="1100" dirty="0">
                           <a:solidFill>
                             <a:srgbClr val="26241F"/>
                           </a:solidFill>
@@ -4500,9 +4658,9 @@
                           <a:ea typeface="Calibri" pitchFamily="34" charset="-122"/>
                           <a:cs typeface="Calibri" pitchFamily="34" charset="-120"/>
                         </a:rPr>
-                        <a:t>[?]</a:t>
+                        <a:t>Growth x0.55, WACC +100bp</a:t>
                       </a:r>
-                      <a:endParaRPr lang="en-US" sz="1200" dirty="0">
+                      <a:endParaRPr lang="en-US" sz="1100" dirty="0">
                         <a:latin typeface="Calibri" charset="0"/>
                         <a:ea typeface="Calibri" charset="0"/>
                         <a:cs typeface="Calibri" charset="0"/>
@@ -4557,7 +4715,7 @@
                         <a:buNone/>
                       </a:pPr>
                       <a:r>
-                        <a:rPr lang="en-US" sz="1200" dirty="0">
+                        <a:rPr lang="en-US" sz="1100" dirty="0">
                           <a:solidFill>
                             <a:srgbClr val="26241F"/>
                           </a:solidFill>
@@ -4565,9 +4723,9 @@
                           <a:ea typeface="Calibri" pitchFamily="34" charset="-122"/>
                           <a:cs typeface="Calibri" pitchFamily="34" charset="-120"/>
                         </a:rPr>
-                        <a:t>[?]</a:t>
+                        <a:t>$191</a:t>
                       </a:r>
-                      <a:endParaRPr lang="en-US" sz="1200" dirty="0">
+                      <a:endParaRPr lang="en-US" sz="1100" dirty="0">
                         <a:latin typeface="Calibri" charset="0"/>
                         <a:ea typeface="Calibri" charset="0"/>
                         <a:cs typeface="Calibri" charset="0"/>
@@ -4622,7 +4780,7 @@
                         <a:buNone/>
                       </a:pPr>
                       <a:r>
-                        <a:rPr lang="en-US" sz="1200" dirty="0">
+                        <a:rPr lang="en-US" sz="1100" dirty="0">
                           <a:solidFill>
                             <a:srgbClr val="26241F"/>
                           </a:solidFill>
@@ -4630,9 +4788,74 @@
                           <a:ea typeface="Calibri" pitchFamily="34" charset="-122"/>
                           <a:cs typeface="Calibri" pitchFamily="34" charset="-120"/>
                         </a:rPr>
-                        <a:t>[?] %</a:t>
+                        <a:t>-52.9%</a:t>
                       </a:r>
-                      <a:endParaRPr lang="en-US" sz="1200" dirty="0">
+                      <a:endParaRPr lang="en-US" sz="1100" dirty="0">
+                        <a:latin typeface="Calibri" charset="0"/>
+                        <a:ea typeface="Calibri" charset="0"/>
+                        <a:cs typeface="Calibri" charset="0"/>
+                      </a:endParaRPr>
+                    </a:p>
+                  </a:txBody>
+                  <a:tcPr marL="91440" marR="91440" marT="45720" marB="45720">
+                    <a:lnL w="12700" cap="flat" cmpd="sng" algn="ctr">
+                      <a:solidFill>
+                        <a:srgbClr val="E3E0D3"/>
+                      </a:solidFill>
+                      <a:prstDash val="solid"/>
+                      <a:round/>
+                      <a:headEnd type="none" w="med" len="med"/>
+                      <a:tailEnd type="none" w="med" len="med"/>
+                    </a:lnL>
+                    <a:lnR w="12700" cap="flat" cmpd="sng" algn="ctr">
+                      <a:solidFill>
+                        <a:srgbClr val="E3E0D3"/>
+                      </a:solidFill>
+                      <a:prstDash val="solid"/>
+                      <a:round/>
+                      <a:headEnd type="none" w="med" len="med"/>
+                      <a:tailEnd type="none" w="med" len="med"/>
+                    </a:lnR>
+                    <a:lnT w="12700" cap="flat" cmpd="sng" algn="ctr">
+                      <a:solidFill>
+                        <a:srgbClr val="E3E0D3"/>
+                      </a:solidFill>
+                      <a:prstDash val="solid"/>
+                      <a:round/>
+                      <a:headEnd type="none" w="med" len="med"/>
+                      <a:tailEnd type="none" w="med" len="med"/>
+                    </a:lnT>
+                    <a:lnB w="12700" cap="flat" cmpd="sng" algn="ctr">
+                      <a:solidFill>
+                        <a:srgbClr val="E3E0D3"/>
+                      </a:solidFill>
+                      <a:prstDash val="solid"/>
+                      <a:round/>
+                      <a:headEnd type="none" w="med" len="med"/>
+                      <a:tailEnd type="none" w="med" len="med"/>
+                    </a:lnB>
+                  </a:tcPr>
+                </a:tc>
+                <a:tc>
+                  <a:txBody>
+                    <a:bodyPr/>
+                    <a:lstStyle/>
+                    <a:p>
+                      <a:pPr indent="0" marL="0">
+                        <a:buNone/>
+                      </a:pPr>
+                      <a:r>
+                        <a:rPr lang="en-US" sz="1100" dirty="0">
+                          <a:solidFill>
+                            <a:srgbClr val="26241F"/>
+                          </a:solidFill>
+                          <a:latin typeface="Calibri" pitchFamily="34" charset="0"/>
+                          <a:ea typeface="Calibri" pitchFamily="34" charset="-122"/>
+                          <a:cs typeface="Calibri" pitchFamily="34" charset="-120"/>
+                        </a:rPr>
+                        <a:t>25%</a:t>
+                      </a:r>
+                      <a:endParaRPr lang="en-US" sz="1100" dirty="0">
                         <a:latin typeface="Calibri" charset="0"/>
                         <a:ea typeface="Calibri" charset="0"/>
                         <a:cs typeface="Calibri" charset="0"/>
@@ -4689,7 +4912,7 @@
                         <a:buNone/>
                       </a:pPr>
                       <a:r>
-                        <a:rPr lang="en-US" sz="1200" dirty="0">
+                        <a:rPr lang="en-US" sz="1100" dirty="0">
                           <a:solidFill>
                             <a:srgbClr val="26241F"/>
                           </a:solidFill>
@@ -4699,7 +4922,7 @@
                         </a:rPr>
                         <a:t>Base</a:t>
                       </a:r>
-                      <a:endParaRPr lang="en-US" sz="1200" dirty="0">
+                      <a:endParaRPr lang="en-US" sz="1100" dirty="0">
                         <a:latin typeface="Calibri" charset="0"/>
                         <a:ea typeface="Calibri" charset="0"/>
                         <a:cs typeface="Calibri" charset="0"/>
@@ -4754,7 +4977,7 @@
                         <a:buNone/>
                       </a:pPr>
                       <a:r>
-                        <a:rPr lang="en-US" sz="1200" dirty="0">
+                        <a:rPr lang="en-US" sz="1100" dirty="0">
                           <a:solidFill>
                             <a:srgbClr val="26241F"/>
                           </a:solidFill>
@@ -4762,9 +4985,9 @@
                           <a:ea typeface="Calibri" pitchFamily="34" charset="-122"/>
                           <a:cs typeface="Calibri" pitchFamily="34" charset="-120"/>
                         </a:rPr>
-                        <a:t>[?]</a:t>
+                        <a:t>As modeled</a:t>
                       </a:r>
-                      <a:endParaRPr lang="en-US" sz="1200" dirty="0">
+                      <a:endParaRPr lang="en-US" sz="1100" dirty="0">
                         <a:latin typeface="Calibri" charset="0"/>
                         <a:ea typeface="Calibri" charset="0"/>
                         <a:cs typeface="Calibri" charset="0"/>
@@ -4819,7 +5042,7 @@
                         <a:buNone/>
                       </a:pPr>
                       <a:r>
-                        <a:rPr lang="en-US" sz="1200" dirty="0">
+                        <a:rPr lang="en-US" sz="1100" dirty="0">
                           <a:solidFill>
                             <a:srgbClr val="26241F"/>
                           </a:solidFill>
@@ -4827,9 +5050,9 @@
                           <a:ea typeface="Calibri" pitchFamily="34" charset="-122"/>
                           <a:cs typeface="Calibri" pitchFamily="34" charset="-120"/>
                         </a:rPr>
-                        <a:t>[?]</a:t>
+                        <a:t>$316</a:t>
                       </a:r>
-                      <a:endParaRPr lang="en-US" sz="1200" dirty="0">
+                      <a:endParaRPr lang="en-US" sz="1100" dirty="0">
                         <a:latin typeface="Calibri" charset="0"/>
                         <a:ea typeface="Calibri" charset="0"/>
                         <a:cs typeface="Calibri" charset="0"/>
@@ -4884,7 +5107,7 @@
                         <a:buNone/>
                       </a:pPr>
                       <a:r>
-                        <a:rPr lang="en-US" sz="1200" dirty="0">
+                        <a:rPr lang="en-US" sz="1100" dirty="0">
                           <a:solidFill>
                             <a:srgbClr val="26241F"/>
                           </a:solidFill>
@@ -4892,9 +5115,74 @@
                           <a:ea typeface="Calibri" pitchFamily="34" charset="-122"/>
                           <a:cs typeface="Calibri" pitchFamily="34" charset="-120"/>
                         </a:rPr>
-                        <a:t>[?] %</a:t>
+                        <a:t>-22.3%</a:t>
                       </a:r>
-                      <a:endParaRPr lang="en-US" sz="1200" dirty="0">
+                      <a:endParaRPr lang="en-US" sz="1100" dirty="0">
+                        <a:latin typeface="Calibri" charset="0"/>
+                        <a:ea typeface="Calibri" charset="0"/>
+                        <a:cs typeface="Calibri" charset="0"/>
+                      </a:endParaRPr>
+                    </a:p>
+                  </a:txBody>
+                  <a:tcPr marL="91440" marR="91440" marT="45720" marB="45720">
+                    <a:lnL w="12700" cap="flat" cmpd="sng" algn="ctr">
+                      <a:solidFill>
+                        <a:srgbClr val="E3E0D3"/>
+                      </a:solidFill>
+                      <a:prstDash val="solid"/>
+                      <a:round/>
+                      <a:headEnd type="none" w="med" len="med"/>
+                      <a:tailEnd type="none" w="med" len="med"/>
+                    </a:lnL>
+                    <a:lnR w="12700" cap="flat" cmpd="sng" algn="ctr">
+                      <a:solidFill>
+                        <a:srgbClr val="E3E0D3"/>
+                      </a:solidFill>
+                      <a:prstDash val="solid"/>
+                      <a:round/>
+                      <a:headEnd type="none" w="med" len="med"/>
+                      <a:tailEnd type="none" w="med" len="med"/>
+                    </a:lnR>
+                    <a:lnT w="12700" cap="flat" cmpd="sng" algn="ctr">
+                      <a:solidFill>
+                        <a:srgbClr val="E3E0D3"/>
+                      </a:solidFill>
+                      <a:prstDash val="solid"/>
+                      <a:round/>
+                      <a:headEnd type="none" w="med" len="med"/>
+                      <a:tailEnd type="none" w="med" len="med"/>
+                    </a:lnT>
+                    <a:lnB w="12700" cap="flat" cmpd="sng" algn="ctr">
+                      <a:solidFill>
+                        <a:srgbClr val="E3E0D3"/>
+                      </a:solidFill>
+                      <a:prstDash val="solid"/>
+                      <a:round/>
+                      <a:headEnd type="none" w="med" len="med"/>
+                      <a:tailEnd type="none" w="med" len="med"/>
+                    </a:lnB>
+                  </a:tcPr>
+                </a:tc>
+                <a:tc>
+                  <a:txBody>
+                    <a:bodyPr/>
+                    <a:lstStyle/>
+                    <a:p>
+                      <a:pPr indent="0" marL="0">
+                        <a:buNone/>
+                      </a:pPr>
+                      <a:r>
+                        <a:rPr lang="en-US" sz="1100" dirty="0">
+                          <a:solidFill>
+                            <a:srgbClr val="26241F"/>
+                          </a:solidFill>
+                          <a:latin typeface="Calibri" pitchFamily="34" charset="0"/>
+                          <a:ea typeface="Calibri" pitchFamily="34" charset="-122"/>
+                          <a:cs typeface="Calibri" pitchFamily="34" charset="-120"/>
+                        </a:rPr>
+                        <a:t>50%</a:t>
+                      </a:r>
+                      <a:endParaRPr lang="en-US" sz="1100" dirty="0">
                         <a:latin typeface="Calibri" charset="0"/>
                         <a:ea typeface="Calibri" charset="0"/>
                         <a:cs typeface="Calibri" charset="0"/>
@@ -4951,7 +5239,7 @@
                         <a:buNone/>
                       </a:pPr>
                       <a:r>
-                        <a:rPr lang="en-US" sz="1200" dirty="0">
+                        <a:rPr lang="en-US" sz="1100" dirty="0">
                           <a:solidFill>
                             <a:srgbClr val="26241F"/>
                           </a:solidFill>
@@ -4961,7 +5249,7 @@
                         </a:rPr>
                         <a:t>Bull</a:t>
                       </a:r>
-                      <a:endParaRPr lang="en-US" sz="1200" dirty="0">
+                      <a:endParaRPr lang="en-US" sz="1100" dirty="0">
                         <a:latin typeface="Calibri" charset="0"/>
                         <a:ea typeface="Calibri" charset="0"/>
                         <a:cs typeface="Calibri" charset="0"/>
@@ -5016,7 +5304,7 @@
                         <a:buNone/>
                       </a:pPr>
                       <a:r>
-                        <a:rPr lang="en-US" sz="1200" dirty="0">
+                        <a:rPr lang="en-US" sz="1100" dirty="0">
                           <a:solidFill>
                             <a:srgbClr val="26241F"/>
                           </a:solidFill>
@@ -5024,9 +5312,9 @@
                           <a:ea typeface="Calibri" pitchFamily="34" charset="-122"/>
                           <a:cs typeface="Calibri" pitchFamily="34" charset="-120"/>
                         </a:rPr>
-                        <a:t>[?]</a:t>
+                        <a:t>Growth x1.35, WACC -100bp</a:t>
                       </a:r>
-                      <a:endParaRPr lang="en-US" sz="1200" dirty="0">
+                      <a:endParaRPr lang="en-US" sz="1100" dirty="0">
                         <a:latin typeface="Calibri" charset="0"/>
                         <a:ea typeface="Calibri" charset="0"/>
                         <a:cs typeface="Calibri" charset="0"/>
@@ -5081,7 +5369,7 @@
                         <a:buNone/>
                       </a:pPr>
                       <a:r>
-                        <a:rPr lang="en-US" sz="1200" dirty="0">
+                        <a:rPr lang="en-US" sz="1100" dirty="0">
                           <a:solidFill>
                             <a:srgbClr val="26241F"/>
                           </a:solidFill>
@@ -5089,9 +5377,9 @@
                           <a:ea typeface="Calibri" pitchFamily="34" charset="-122"/>
                           <a:cs typeface="Calibri" pitchFamily="34" charset="-120"/>
                         </a:rPr>
-                        <a:t>[?]</a:t>
+                        <a:t>$502</a:t>
                       </a:r>
-                      <a:endParaRPr lang="en-US" sz="1200" dirty="0">
+                      <a:endParaRPr lang="en-US" sz="1100" dirty="0">
                         <a:latin typeface="Calibri" charset="0"/>
                         <a:ea typeface="Calibri" charset="0"/>
                         <a:cs typeface="Calibri" charset="0"/>
@@ -5146,7 +5434,7 @@
                         <a:buNone/>
                       </a:pPr>
                       <a:r>
-                        <a:rPr lang="en-US" sz="1200" dirty="0">
+                        <a:rPr lang="en-US" sz="1100" dirty="0">
                           <a:solidFill>
                             <a:srgbClr val="26241F"/>
                           </a:solidFill>
@@ -5154,9 +5442,9 @@
                           <a:ea typeface="Calibri" pitchFamily="34" charset="-122"/>
                           <a:cs typeface="Calibri" pitchFamily="34" charset="-120"/>
                         </a:rPr>
-                        <a:t>[?] %</a:t>
+                        <a:t>+23.7%</a:t>
                       </a:r>
-                      <a:endParaRPr lang="en-US" sz="1200" dirty="0">
+                      <a:endParaRPr lang="en-US" sz="1100" dirty="0">
                         <a:latin typeface="Calibri" charset="0"/>
                         <a:ea typeface="Calibri" charset="0"/>
                         <a:cs typeface="Calibri" charset="0"/>
@@ -5202,9 +5490,7 @@
                     </a:lnB>
                   </a:tcPr>
                 </a:tc>
-              </a:tr>
-              <a:tr h="402336">
-                <a:tc gridSpan="3">
+                <a:tc>
                   <a:txBody>
                     <a:bodyPr/>
                     <a:lstStyle/>
@@ -5213,7 +5499,74 @@
                         <a:buNone/>
                       </a:pPr>
                       <a:r>
-                        <a:rPr lang="en-US" sz="1200" b="1" dirty="0">
+                        <a:rPr lang="en-US" sz="1100" dirty="0">
+                          <a:solidFill>
+                            <a:srgbClr val="26241F"/>
+                          </a:solidFill>
+                          <a:latin typeface="Calibri" pitchFamily="34" charset="0"/>
+                          <a:ea typeface="Calibri" pitchFamily="34" charset="-122"/>
+                          <a:cs typeface="Calibri" pitchFamily="34" charset="-120"/>
+                        </a:rPr>
+                        <a:t>25%</a:t>
+                      </a:r>
+                      <a:endParaRPr lang="en-US" sz="1100" dirty="0">
+                        <a:latin typeface="Calibri" charset="0"/>
+                        <a:ea typeface="Calibri" charset="0"/>
+                        <a:cs typeface="Calibri" charset="0"/>
+                      </a:endParaRPr>
+                    </a:p>
+                  </a:txBody>
+                  <a:tcPr marL="91440" marR="91440" marT="45720" marB="45720">
+                    <a:lnL w="12700" cap="flat" cmpd="sng" algn="ctr">
+                      <a:solidFill>
+                        <a:srgbClr val="E3E0D3"/>
+                      </a:solidFill>
+                      <a:prstDash val="solid"/>
+                      <a:round/>
+                      <a:headEnd type="none" w="med" len="med"/>
+                      <a:tailEnd type="none" w="med" len="med"/>
+                    </a:lnL>
+                    <a:lnR w="12700" cap="flat" cmpd="sng" algn="ctr">
+                      <a:solidFill>
+                        <a:srgbClr val="E3E0D3"/>
+                      </a:solidFill>
+                      <a:prstDash val="solid"/>
+                      <a:round/>
+                      <a:headEnd type="none" w="med" len="med"/>
+                      <a:tailEnd type="none" w="med" len="med"/>
+                    </a:lnR>
+                    <a:lnT w="12700" cap="flat" cmpd="sng" algn="ctr">
+                      <a:solidFill>
+                        <a:srgbClr val="E3E0D3"/>
+                      </a:solidFill>
+                      <a:prstDash val="solid"/>
+                      <a:round/>
+                      <a:headEnd type="none" w="med" len="med"/>
+                      <a:tailEnd type="none" w="med" len="med"/>
+                    </a:lnT>
+                    <a:lnB w="12700" cap="flat" cmpd="sng" algn="ctr">
+                      <a:solidFill>
+                        <a:srgbClr val="E3E0D3"/>
+                      </a:solidFill>
+                      <a:prstDash val="solid"/>
+                      <a:round/>
+                      <a:headEnd type="none" w="med" len="med"/>
+                      <a:tailEnd type="none" w="med" len="med"/>
+                    </a:lnB>
+                  </a:tcPr>
+                </a:tc>
+              </a:tr>
+              <a:tr h="402336">
+                <a:tc gridSpan="2">
+                  <a:txBody>
+                    <a:bodyPr/>
+                    <a:lstStyle/>
+                    <a:p>
+                      <a:pPr indent="0" marL="0">
+                        <a:buNone/>
+                      </a:pPr>
+                      <a:r>
+                        <a:rPr lang="en-US" sz="1100" b="1" dirty="0">
                           <a:solidFill>
                             <a:srgbClr val="26241F"/>
                           </a:solidFill>
@@ -5223,7 +5576,7 @@
                         </a:rPr>
                         <a:t>Weighted Target Price:</a:t>
                       </a:r>
-                      <a:endParaRPr lang="en-US" sz="1200" dirty="0">
+                      <a:endParaRPr lang="en-US" sz="1100" dirty="0">
                         <a:latin typeface="Calibri" charset="0"/>
                         <a:ea typeface="Calibri" charset="0"/>
                         <a:cs typeface="Calibri" charset="0"/>
@@ -5268,9 +5621,6 @@
                       <a:tailEnd type="none" w="med" len="med"/>
                     </a:lnB>
                   </a:tcPr>
-                </a:tc>
-                <a:tc hMerge="1">
-                  <a:tcPr/>
                 </a:tc>
                 <a:tc hMerge="1">
                   <a:tcPr/>
@@ -5284,7 +5634,7 @@
                         <a:buNone/>
                       </a:pPr>
                       <a:r>
-                        <a:rPr lang="en-US" sz="1200" dirty="0">
+                        <a:rPr lang="en-US" sz="1100" b="1" dirty="0">
                           <a:solidFill>
                             <a:srgbClr val="26241F"/>
                           </a:solidFill>
@@ -5292,9 +5642,9 @@
                           <a:ea typeface="Calibri" pitchFamily="34" charset="-122"/>
                           <a:cs typeface="Calibri" pitchFamily="34" charset="-120"/>
                         </a:rPr>
-                        <a:t>[?]</a:t>
+                        <a:t>$331</a:t>
                       </a:r>
-                      <a:endParaRPr lang="en-US" sz="1200" dirty="0">
+                      <a:endParaRPr lang="en-US" sz="1100" dirty="0">
                         <a:latin typeface="Calibri" charset="0"/>
                         <a:ea typeface="Calibri" charset="0"/>
                         <a:cs typeface="Calibri" charset="0"/>
@@ -5340,6 +5690,136 @@
                     </a:lnB>
                   </a:tcPr>
                 </a:tc>
+                <a:tc>
+                  <a:txBody>
+                    <a:bodyPr/>
+                    <a:lstStyle/>
+                    <a:p>
+                      <a:pPr indent="0" marL="0">
+                        <a:buNone/>
+                      </a:pPr>
+                      <a:r>
+                        <a:rPr lang="en-US" sz="1100" b="1" dirty="0">
+                          <a:solidFill>
+                            <a:srgbClr val="26241F"/>
+                          </a:solidFill>
+                          <a:latin typeface="Calibri" pitchFamily="34" charset="0"/>
+                          <a:ea typeface="Calibri" pitchFamily="34" charset="-122"/>
+                          <a:cs typeface="Calibri" pitchFamily="34" charset="-120"/>
+                        </a:rPr>
+                        <a:t>-18.5%</a:t>
+                      </a:r>
+                      <a:endParaRPr lang="en-US" sz="1100" dirty="0">
+                        <a:latin typeface="Calibri" charset="0"/>
+                        <a:ea typeface="Calibri" charset="0"/>
+                        <a:cs typeface="Calibri" charset="0"/>
+                      </a:endParaRPr>
+                    </a:p>
+                  </a:txBody>
+                  <a:tcPr marL="91440" marR="91440" marT="45720" marB="45720">
+                    <a:lnL w="12700" cap="flat" cmpd="sng" algn="ctr">
+                      <a:solidFill>
+                        <a:srgbClr val="E3E0D3"/>
+                      </a:solidFill>
+                      <a:prstDash val="solid"/>
+                      <a:round/>
+                      <a:headEnd type="none" w="med" len="med"/>
+                      <a:tailEnd type="none" w="med" len="med"/>
+                    </a:lnL>
+                    <a:lnR w="12700" cap="flat" cmpd="sng" algn="ctr">
+                      <a:solidFill>
+                        <a:srgbClr val="E3E0D3"/>
+                      </a:solidFill>
+                      <a:prstDash val="solid"/>
+                      <a:round/>
+                      <a:headEnd type="none" w="med" len="med"/>
+                      <a:tailEnd type="none" w="med" len="med"/>
+                    </a:lnR>
+                    <a:lnT w="12700" cap="flat" cmpd="sng" algn="ctr">
+                      <a:solidFill>
+                        <a:srgbClr val="E3E0D3"/>
+                      </a:solidFill>
+                      <a:prstDash val="solid"/>
+                      <a:round/>
+                      <a:headEnd type="none" w="med" len="med"/>
+                      <a:tailEnd type="none" w="med" len="med"/>
+                    </a:lnT>
+                    <a:lnB w="12700" cap="flat" cmpd="sng" algn="ctr">
+                      <a:solidFill>
+                        <a:srgbClr val="E3E0D3"/>
+                      </a:solidFill>
+                      <a:prstDash val="solid"/>
+                      <a:round/>
+                      <a:headEnd type="none" w="med" len="med"/>
+                      <a:tailEnd type="none" w="med" len="med"/>
+                    </a:lnB>
+                  </a:tcPr>
+                </a:tc>
+                <a:tc>
+                  <a:txBody>
+                    <a:bodyPr/>
+                    <a:lstStyle/>
+                    <a:p>
+                      <a:pPr indent="0" marL="0">
+                        <a:buNone/>
+                      </a:pPr>
+                      <a:r>
+                        <a:rPr lang="en-US" sz="1100" dirty="0">
+                          <a:solidFill>
+                            <a:srgbClr val="26241F"/>
+                          </a:solidFill>
+                          <a:latin typeface="Calibri" pitchFamily="34" charset="0"/>
+                          <a:ea typeface="Calibri" pitchFamily="34" charset="-122"/>
+                          <a:cs typeface="Calibri" pitchFamily="34" charset="-120"/>
+                        </a:rPr>
+                        <a:t>100%</a:t>
+                      </a:r>
+                      <a:endParaRPr lang="en-US" sz="1100" dirty="0">
+                        <a:latin typeface="Calibri" charset="0"/>
+                        <a:ea typeface="Calibri" charset="0"/>
+                        <a:cs typeface="Calibri" charset="0"/>
+                      </a:endParaRPr>
+                    </a:p>
+                  </a:txBody>
+                  <a:tcPr marL="91440" marR="91440" marT="45720" marB="45720">
+                    <a:lnL w="12700" cap="flat" cmpd="sng" algn="ctr">
+                      <a:solidFill>
+                        <a:srgbClr val="E3E0D3"/>
+                      </a:solidFill>
+                      <a:prstDash val="solid"/>
+                      <a:round/>
+                      <a:headEnd type="none" w="med" len="med"/>
+                      <a:tailEnd type="none" w="med" len="med"/>
+                    </a:lnL>
+                    <a:lnR w="12700" cap="flat" cmpd="sng" algn="ctr">
+                      <a:solidFill>
+                        <a:srgbClr val="E3E0D3"/>
+                      </a:solidFill>
+                      <a:prstDash val="solid"/>
+                      <a:round/>
+                      <a:headEnd type="none" w="med" len="med"/>
+                      <a:tailEnd type="none" w="med" len="med"/>
+                    </a:lnR>
+                    <a:lnT w="12700" cap="flat" cmpd="sng" algn="ctr">
+                      <a:solidFill>
+                        <a:srgbClr val="E3E0D3"/>
+                      </a:solidFill>
+                      <a:prstDash val="solid"/>
+                      <a:round/>
+                      <a:headEnd type="none" w="med" len="med"/>
+                      <a:tailEnd type="none" w="med" len="med"/>
+                    </a:lnT>
+                    <a:lnB w="12700" cap="flat" cmpd="sng" algn="ctr">
+                      <a:solidFill>
+                        <a:srgbClr val="E3E0D3"/>
+                      </a:solidFill>
+                      <a:prstDash val="solid"/>
+                      <a:round/>
+                      <a:headEnd type="none" w="med" len="med"/>
+                      <a:tailEnd type="none" w="med" len="med"/>
+                    </a:lnB>
+                  </a:tcPr>
+                </a:tc>
               </a:tr>
             </a:tbl>
           </a:graphicData>
@@ -5353,7 +5833,46 @@
         </p:nvSpPr>
         <p:spPr>
           <a:xfrm>
-            <a:off x="457200" y="3429000"/>
+            <a:off x="457200" y="3246120"/>
+            <a:ext cx="11247120" cy="274320"/>
+          </a:xfrm>
+          <a:prstGeom prst="rect">
+            <a:avLst/>
+          </a:prstGeom>
+          <a:noFill/>
+          <a:ln/>
+        </p:spPr>
+        <p:txBody>
+          <a:bodyPr wrap="square" lIns="0" tIns="0" rIns="0" bIns="0" rtlCol="0" anchor="ctr"/>
+          <a:lstStyle/>
+          <a:p>
+            <a:pPr indent="0" marL="0">
+              <a:buNone/>
+            </a:pPr>
+            <a:r>
+              <a:rPr lang="en-US" sz="900" i="1" dirty="0">
+                <a:solidFill>
+                  <a:srgbClr val="6F6B60"/>
+                </a:solidFill>
+                <a:latin typeface="Calibri" pitchFamily="34" charset="0"/>
+                <a:ea typeface="Calibri" pitchFamily="34" charset="-122"/>
+                <a:cs typeface="Calibri" pitchFamily="34" charset="-120"/>
+              </a:rPr>
+              <a:t>Weights (25/50/25) and the Bear/Bull growth-and-margin multipliers are stated modeling assumptions, not sourced figures — change them freely to reflect your own view. Full build in the downloadable DCF workbook (this pitch's Research Toolkit).</a:t>
+            </a:r>
+            <a:endParaRPr lang="en-US" sz="900" dirty="0"/>
+          </a:p>
+        </p:txBody>
+      </p:sp>
+      <p:sp>
+        <p:nvSpPr>
+          <p:cNvPr id="5" name="Text 2"/>
+          <p:cNvSpPr/>
+          <p:nvPr/>
+        </p:nvSpPr>
+        <p:spPr>
+          <a:xfrm>
+            <a:off x="457200" y="3611880"/>
             <a:ext cx="5486400" cy="320040"/>
           </a:xfrm>
           <a:prstGeom prst="rect">
@@ -5386,14 +5905,14 @@
       </p:sp>
       <p:sp>
         <p:nvSpPr>
-          <p:cNvPr id="5" name="Text 2"/>
-          <p:cNvSpPr/>
-          <p:nvPr/>
-        </p:nvSpPr>
-        <p:spPr>
-          <a:xfrm>
-            <a:off x="457200" y="3840480"/>
-            <a:ext cx="11247120" cy="457200"/>
+          <p:cNvPr id="6" name="Text 3"/>
+          <p:cNvSpPr/>
+          <p:nvPr/>
+        </p:nvSpPr>
+        <p:spPr>
+          <a:xfrm>
+            <a:off x="457200" y="3977640"/>
+            <a:ext cx="11247120" cy="365760"/>
           </a:xfrm>
           <a:prstGeom prst="rect">
             <a:avLst/>
@@ -5417,7 +5936,7 @@
                 <a:ea typeface="Calibri" pitchFamily="34" charset="-122"/>
                 <a:cs typeface="Calibri" pitchFamily="34" charset="-120"/>
               </a:rPr>
-              <a:t>Risk-free rate: [?]      Beta: [?]      Equity Risk Premium: [?]      Cost of Debt (pre-tax): [?]      Tax Rate: [?]</a:t>
+              <a:t>Risk-free rate: 4.62%      Beta: 1.25      Equity Risk Premium: 5%      Cost of Debt (pre-tax): 5%      Tax Rate: 20%      WACC: 10.9%</a:t>
             </a:r>
             <a:endParaRPr lang="en-US" sz="1200" dirty="0"/>
           </a:p>
@@ -5425,7 +5944,7 @@
       </p:sp>
       <p:sp>
         <p:nvSpPr>
-          <p:cNvPr id="6" name="Shape 3"/>
+          <p:cNvPr id="7" name="Shape 4"/>
           <p:cNvSpPr/>
           <p:nvPr/>
         </p:nvSpPr>
@@ -5452,7 +5971,7 @@
       </p:sp>
       <p:sp>
         <p:nvSpPr>
-          <p:cNvPr id="7" name="Text 4"/>
+          <p:cNvPr id="8" name="Text 5"/>
           <p:cNvSpPr/>
           <p:nvPr/>
         </p:nvSpPr>
@@ -5483,7 +6002,7 @@
                 <a:ea typeface="Calibri" pitchFamily="34" charset="-122"/>
                 <a:cs typeface="Calibri" pitchFamily="34" charset="-120"/>
               </a:rPr>
-              <a:t>Build this in Excel — don't guess at a DCF freehand.
+              <a:t>This table is real, not a placeholder — pulled from the actual DCF workbook.
 </a:t>
             </a:r>
             <a:pPr indent="0" marL="0">
@@ -5498,7 +6017,7 @@
                 <a:ea typeface="Calibri" pitchFamily="34" charset="-122"/>
                 <a:cs typeface="Calibri" pitchFamily="34" charset="-120"/>
               </a:rPr>
-              <a:t>Download the DCF and Trading Comps templates at bloombruh.com/templates — pick "Taiwan Semiconductor Mfg. Co." or the closest available sector match. Every cell is a live formula prefilled with real data; you only need to adjust the assumptions above.</a:t>
+              <a:t>Download the full Taiwan Semiconductor Mfg. Co. DCF workbook (this pitch's Research Toolkit) for the complete 5-year FCF build behind every number above, plus a live Bear/Base/Bull sheet where you can change any assumption and watch the target price recompute. Every hardcoded input there is sourced — see this deck's final Sources slide, or the workbook's own Sources tab.</a:t>
             </a:r>
             <a:endParaRPr lang="en-US" sz="1200" dirty="0"/>
           </a:p>
@@ -5506,7 +6025,7 @@
       </p:sp>
       <p:sp>
         <p:nvSpPr>
-          <p:cNvPr id="8" name="Text 5"/>
+          <p:cNvPr id="9" name="Text 6"/>
           <p:cNvSpPr/>
           <p:nvPr/>
         </p:nvSpPr>
@@ -5545,7 +6064,7 @@
       </p:sp>
       <p:sp>
         <p:nvSpPr>
-          <p:cNvPr id="9" name="Text 6"/>
+          <p:cNvPr id="10" name="Text 7"/>
           <p:cNvSpPr/>
           <p:nvPr/>
         </p:nvSpPr>
@@ -5922,7 +6441,7 @@
         <p:spPr>
           <a:xfrm>
             <a:off x="457200" y="4114800"/>
-            <a:ext cx="11247120" cy="2194560"/>
+            <a:ext cx="11247120" cy="2331720"/>
           </a:xfrm>
           <a:prstGeom prst="rect">
             <a:avLst/>
@@ -5936,13 +6455,13 @@
           <a:p>
             <a:pPr marL="342900" indent="-342900">
               <a:spcAft>
-                <a:spcPts val="1000"/>
+                <a:spcPts val="800"/>
               </a:spcAft>
               <a:buSzPct val="100000"/>
               <a:buChar char="–"/>
             </a:pPr>
             <a:r>
-              <a:rPr lang="en-US" sz="1250" dirty="0">
+              <a:rPr lang="en-US" sz="1150" dirty="0">
                 <a:solidFill>
                   <a:srgbClr val="26241F"/>
                 </a:solidFill>
@@ -5952,18 +6471,18 @@
               </a:rPr>
               <a:t>Full comparable companies table (margins, growth, EV/EBITDA, P/E — see this pitch's Research Toolkit for real comps)</a:t>
             </a:r>
-            <a:endParaRPr lang="en-US" sz="1250" dirty="0"/>
+            <a:endParaRPr lang="en-US" sz="1150" dirty="0"/>
           </a:p>
           <a:p>
             <a:pPr marL="342900" indent="-342900">
               <a:spcAft>
-                <a:spcPts val="1000"/>
+                <a:spcPts val="800"/>
               </a:spcAft>
               <a:buSzPct val="100000"/>
               <a:buChar char="–"/>
             </a:pPr>
             <a:r>
-              <a:rPr lang="en-US" sz="1250" dirty="0">
+              <a:rPr lang="en-US" sz="1150" dirty="0">
                 <a:solidFill>
                   <a:srgbClr val="26241F"/>
                 </a:solidFill>
@@ -5973,18 +6492,18 @@
               </a:rPr>
               <a:t>Porter's Five Forces for the industry</a:t>
             </a:r>
-            <a:endParaRPr lang="en-US" sz="1250" dirty="0"/>
+            <a:endParaRPr lang="en-US" sz="1150" dirty="0"/>
           </a:p>
           <a:p>
             <a:pPr marL="342900" indent="-342900">
               <a:spcAft>
-                <a:spcPts val="1000"/>
+                <a:spcPts val="800"/>
               </a:spcAft>
               <a:buSzPct val="100000"/>
               <a:buChar char="–"/>
             </a:pPr>
             <a:r>
-              <a:rPr lang="en-US" sz="1250" dirty="0">
+              <a:rPr lang="en-US" sz="1150" dirty="0">
                 <a:solidFill>
                   <a:srgbClr val="26241F"/>
                 </a:solidFill>
@@ -5994,18 +6513,18 @@
               </a:rPr>
               <a:t>Precedent M&amp;A transactions in the sector, if relevant to the thesis</a:t>
             </a:r>
-            <a:endParaRPr lang="en-US" sz="1250" dirty="0"/>
+            <a:endParaRPr lang="en-US" sz="1150" dirty="0"/>
           </a:p>
           <a:p>
             <a:pPr marL="342900" indent="-342900">
               <a:spcAft>
-                <a:spcPts val="1000"/>
+                <a:spcPts val="800"/>
               </a:spcAft>
               <a:buSzPct val="100000"/>
               <a:buChar char="–"/>
             </a:pPr>
             <a:r>
-              <a:rPr lang="en-US" sz="1250" dirty="0">
+              <a:rPr lang="en-US" sz="1150" dirty="0">
                 <a:solidFill>
                   <a:srgbClr val="26241F"/>
                 </a:solidFill>
@@ -6015,18 +6534,18 @@
               </a:rPr>
               <a:t>Management/insider activity summary (recent buying or selling, ownership %)</a:t>
             </a:r>
-            <a:endParaRPr lang="en-US" sz="1250" dirty="0"/>
+            <a:endParaRPr lang="en-US" sz="1150" dirty="0"/>
           </a:p>
           <a:p>
             <a:pPr marL="342900" indent="-342900">
               <a:spcAft>
-                <a:spcPts val="1000"/>
+                <a:spcPts val="800"/>
               </a:spcAft>
               <a:buSzPct val="100000"/>
               <a:buChar char="–"/>
             </a:pPr>
             <a:r>
-              <a:rPr lang="en-US" sz="1250" dirty="0">
+              <a:rPr lang="en-US" sz="1150" dirty="0">
                 <a:solidFill>
                   <a:srgbClr val="26241F"/>
                 </a:solidFill>
@@ -6034,9 +6553,30 @@
                 <a:ea typeface="Calibri" pitchFamily="34" charset="-122"/>
                 <a:cs typeface="Calibri" pitchFamily="34" charset="-120"/>
               </a:rPr>
-              <a:t>Full DCF output + sensitivity table (price target vs. WACC and terminal growth/exit multiple)</a:t>
-            </a:r>
-            <a:endParaRPr lang="en-US" sz="1250" dirty="0"/>
+              <a:t>DCF output + Bear/Base/Bull sensitivity — done on the previous slide and in the downloadable workbook; re-run it with your own view on growth, margin, or WACC before you present it as yours</a:t>
+            </a:r>
+            <a:endParaRPr lang="en-US" sz="1150" dirty="0"/>
+          </a:p>
+          <a:p>
+            <a:pPr marL="342900" indent="-342900">
+              <a:spcAft>
+                <a:spcPts val="800"/>
+              </a:spcAft>
+              <a:buSzPct val="100000"/>
+              <a:buChar char="–"/>
+            </a:pPr>
+            <a:r>
+              <a:rPr lang="en-US" sz="1150" dirty="0">
+                <a:solidFill>
+                  <a:srgbClr val="26241F"/>
+                </a:solidFill>
+                <a:latin typeface="Calibri" pitchFamily="34" charset="0"/>
+                <a:ea typeface="Calibri" pitchFamily="34" charset="-122"/>
+                <a:cs typeface="Calibri" pitchFamily="34" charset="-120"/>
+              </a:rPr>
+              <a:t>Every real number in this deck sourced on the next slide — cite the same sources yourself, don't just cite this deck</a:t>
+            </a:r>
+            <a:endParaRPr lang="en-US" sz="1150" dirty="0"/>
           </a:p>
         </p:txBody>
       </p:sp>
@@ -6113,6 +6653,1466 @@
                 <a:cs typeface="Calibri" pitchFamily="34" charset="-120"/>
               </a:rPr>
               <a:t>8</a:t>
+            </a:r>
+            <a:endParaRPr lang="en-US" sz="800" dirty="0"/>
+          </a:p>
+        </p:txBody>
+      </p:sp>
+    </p:spTree>
+  </p:cSld>
+  <p:clrMapOvr>
+    <a:masterClrMapping/>
+  </p:clrMapOvr>
+</p:sld>
+</file>
+
+<file path=ppt/slides/slide9.xml><?xml version="1.0" encoding="utf-8"?>
+<p:sld xmlns:a="http://schemas.openxmlformats.org/drawingml/2006/main" xmlns:r="http://schemas.openxmlformats.org/officeDocument/2006/relationships" xmlns:p="http://schemas.openxmlformats.org/presentationml/2006/main">
+  <p:cSld name="Slide 9">
+    <p:bg>
+      <p:bgPr>
+        <a:solidFill>
+          <a:srgbClr val="26241F"/>
+        </a:solidFill>
+      </p:bgPr>
+    </p:bg>
+    <p:spTree>
+      <p:nvGrpSpPr>
+        <p:cNvPr id="1" name=""/>
+        <p:cNvGrpSpPr/>
+        <p:nvPr/>
+      </p:nvGrpSpPr>
+      <p:grpSpPr>
+        <a:xfrm>
+          <a:off x="0" y="0"/>
+          <a:ext cx="0" cy="0"/>
+          <a:chOff x="0" y="0"/>
+          <a:chExt cx="0" cy="0"/>
+        </a:xfrm>
+      </p:grpSpPr>
+      <p:sp>
+        <p:nvSpPr>
+          <p:cNvPr id="2" name="Text 0"/>
+          <p:cNvSpPr/>
+          <p:nvPr/>
+        </p:nvSpPr>
+        <p:spPr>
+          <a:xfrm>
+            <a:off x="457200" y="365760"/>
+            <a:ext cx="11247120" cy="548640"/>
+          </a:xfrm>
+          <a:prstGeom prst="rect">
+            <a:avLst/>
+          </a:prstGeom>
+          <a:noFill/>
+          <a:ln/>
+        </p:spPr>
+        <p:txBody>
+          <a:bodyPr wrap="square" lIns="0" tIns="0" rIns="0" bIns="0" rtlCol="0" anchor="ctr"/>
+          <a:lstStyle/>
+          <a:p>
+            <a:pPr indent="0" marL="0">
+              <a:buNone/>
+            </a:pPr>
+            <a:r>
+              <a:rPr lang="en-US" sz="2600" b="1" dirty="0">
+                <a:solidFill>
+                  <a:srgbClr val="FFFFFF"/>
+                </a:solidFill>
+                <a:latin typeface="Cambria" pitchFamily="34" charset="0"/>
+                <a:ea typeface="Cambria" pitchFamily="34" charset="-122"/>
+                <a:cs typeface="Cambria" pitchFamily="34" charset="-120"/>
+              </a:rPr>
+              <a:t>Sources &amp; Data Appendix</a:t>
+            </a:r>
+            <a:endParaRPr lang="en-US" sz="2600" dirty="0"/>
+          </a:p>
+        </p:txBody>
+      </p:sp>
+      <p:sp>
+        <p:nvSpPr>
+          <p:cNvPr id="3" name="Text 1"/>
+          <p:cNvSpPr/>
+          <p:nvPr/>
+        </p:nvSpPr>
+        <p:spPr>
+          <a:xfrm>
+            <a:off x="457200" y="960120"/>
+            <a:ext cx="11247120" cy="457200"/>
+          </a:xfrm>
+          <a:prstGeom prst="rect">
+            <a:avLst/>
+          </a:prstGeom>
+          <a:noFill/>
+          <a:ln/>
+        </p:spPr>
+        <p:txBody>
+          <a:bodyPr wrap="square" lIns="0" tIns="0" rIns="0" bIns="0" rtlCol="0" anchor="ctr"/>
+          <a:lstStyle/>
+          <a:p>
+            <a:pPr indent="0" marL="0">
+              <a:buNone/>
+            </a:pPr>
+            <a:r>
+              <a:rPr lang="en-US" sz="1200" i="1" dirty="0">
+                <a:solidFill>
+                  <a:srgbClr val="E3E0D3"/>
+                </a:solidFill>
+                <a:latin typeface="Calibri" pitchFamily="34" charset="0"/>
+                <a:ea typeface="Calibri" pitchFamily="34" charset="-122"/>
+                <a:cs typeface="Calibri" pitchFamily="34" charset="-120"/>
+              </a:rPr>
+              <a:t>Every hardcoded number used to build the valuation on the DCF slide — where it came from, compiled August 2026. A dated snapshot, not a live feed: verify against a live quote before you present this.</a:t>
+            </a:r>
+            <a:endParaRPr lang="en-US" sz="1200" dirty="0"/>
+          </a:p>
+        </p:txBody>
+      </p:sp>
+      <p:graphicFrame>
+        <p:nvGraphicFramePr>
+          <p:cNvPr id="10" name="Table 0"/>
+          <p:cNvGraphicFramePr>
+            <a:graphicFrameLocks noGrp="1"/>
+          </p:cNvGraphicFramePr>
+          <p:nvPr>
+            <p:extLst>
+              <p:ext uri="{D42A27DB-BD31-4B8C-83A1-F6EECF244321}">
+                <p14:modId xmlns:p14="http://schemas.microsoft.com/office/powerpoint/2010/main" val="1579011935"/>
+              </p:ext>
+            </p:extLst>
+          </p:nvPr>
+        </p:nvGraphicFramePr>
+        <p:xfrm>
+          <a:off x="457200" y="1554480"/>
+          <a:ext cx="11247120" cy="4572000"/>
+        </p:xfrm>
+        <a:graphic>
+          <a:graphicData uri="http://schemas.openxmlformats.org/drawingml/2006/table">
+            <a:tbl>
+              <a:tblPr/>
+              <a:tblGrid>
+                <a:gridCol w="2560320"/>
+                <a:gridCol w="8686800"/>
+              </a:tblGrid>
+              <a:tr h="508000">
+                <a:tc>
+                  <a:txBody>
+                    <a:bodyPr/>
+                    <a:lstStyle/>
+                    <a:p>
+                      <a:pPr indent="0" marL="0">
+                        <a:buNone/>
+                      </a:pPr>
+                      <a:r>
+                        <a:rPr lang="en-US" sz="1000" b="1" dirty="0">
+                          <a:solidFill>
+                            <a:srgbClr val="FFFFFF"/>
+                          </a:solidFill>
+                          <a:latin typeface="Calibri" pitchFamily="34" charset="0"/>
+                          <a:ea typeface="Calibri" pitchFamily="34" charset="-122"/>
+                          <a:cs typeface="Calibri" pitchFamily="34" charset="-120"/>
+                        </a:rPr>
+                        <a:t>Input</a:t>
+                      </a:r>
+                      <a:endParaRPr lang="en-US" sz="1000" dirty="0">
+                        <a:latin typeface="Calibri" charset="0"/>
+                        <a:ea typeface="Calibri" charset="0"/>
+                        <a:cs typeface="Calibri" charset="0"/>
+                      </a:endParaRPr>
+                    </a:p>
+                  </a:txBody>
+                  <a:tcPr marL="91440" marR="91440" marT="45720" marB="45720" anchor="t">
+                    <a:lnL w="12700" cap="flat" cmpd="sng" algn="ctr">
+                      <a:solidFill>
+                        <a:srgbClr val="3C3833"/>
+                      </a:solidFill>
+                      <a:prstDash val="solid"/>
+                      <a:round/>
+                      <a:headEnd type="none" w="med" len="med"/>
+                      <a:tailEnd type="none" w="med" len="med"/>
+                    </a:lnL>
+                    <a:lnR w="12700" cap="flat" cmpd="sng" algn="ctr">
+                      <a:solidFill>
+                        <a:srgbClr val="3C3833"/>
+                      </a:solidFill>
+                      <a:prstDash val="solid"/>
+                      <a:round/>
+                      <a:headEnd type="none" w="med" len="med"/>
+                      <a:tailEnd type="none" w="med" len="med"/>
+                    </a:lnR>
+                    <a:lnT w="12700" cap="flat" cmpd="sng" algn="ctr">
+                      <a:solidFill>
+                        <a:srgbClr val="3C3833"/>
+                      </a:solidFill>
+                      <a:prstDash val="solid"/>
+                      <a:round/>
+                      <a:headEnd type="none" w="med" len="med"/>
+                      <a:tailEnd type="none" w="med" len="med"/>
+                    </a:lnT>
+                    <a:lnB w="12700" cap="flat" cmpd="sng" algn="ctr">
+                      <a:solidFill>
+                        <a:srgbClr val="3C3833"/>
+                      </a:solidFill>
+                      <a:prstDash val="solid"/>
+                      <a:round/>
+                      <a:headEnd type="none" w="med" len="med"/>
+                      <a:tailEnd type="none" w="med" len="med"/>
+                    </a:lnB>
+                    <a:solidFill>
+                      <a:srgbClr val="BC5B33"/>
+                    </a:solidFill>
+                  </a:tcPr>
+                </a:tc>
+                <a:tc>
+                  <a:txBody>
+                    <a:bodyPr/>
+                    <a:lstStyle/>
+                    <a:p>
+                      <a:pPr indent="0" marL="0">
+                        <a:buNone/>
+                      </a:pPr>
+                      <a:r>
+                        <a:rPr lang="en-US" sz="1000" b="1" dirty="0">
+                          <a:solidFill>
+                            <a:srgbClr val="FFFFFF"/>
+                          </a:solidFill>
+                          <a:latin typeface="Calibri" pitchFamily="34" charset="0"/>
+                          <a:ea typeface="Calibri" pitchFamily="34" charset="-122"/>
+                          <a:cs typeface="Calibri" pitchFamily="34" charset="-120"/>
+                        </a:rPr>
+                        <a:t>Source / Note</a:t>
+                      </a:r>
+                      <a:endParaRPr lang="en-US" sz="1000" dirty="0">
+                        <a:latin typeface="Calibri" charset="0"/>
+                        <a:ea typeface="Calibri" charset="0"/>
+                        <a:cs typeface="Calibri" charset="0"/>
+                      </a:endParaRPr>
+                    </a:p>
+                  </a:txBody>
+                  <a:tcPr marL="91440" marR="91440" marT="45720" marB="45720" anchor="t">
+                    <a:lnL w="12700" cap="flat" cmpd="sng" algn="ctr">
+                      <a:solidFill>
+                        <a:srgbClr val="3C3833"/>
+                      </a:solidFill>
+                      <a:prstDash val="solid"/>
+                      <a:round/>
+                      <a:headEnd type="none" w="med" len="med"/>
+                      <a:tailEnd type="none" w="med" len="med"/>
+                    </a:lnL>
+                    <a:lnR w="12700" cap="flat" cmpd="sng" algn="ctr">
+                      <a:solidFill>
+                        <a:srgbClr val="3C3833"/>
+                      </a:solidFill>
+                      <a:prstDash val="solid"/>
+                      <a:round/>
+                      <a:headEnd type="none" w="med" len="med"/>
+                      <a:tailEnd type="none" w="med" len="med"/>
+                    </a:lnR>
+                    <a:lnT w="12700" cap="flat" cmpd="sng" algn="ctr">
+                      <a:solidFill>
+                        <a:srgbClr val="3C3833"/>
+                      </a:solidFill>
+                      <a:prstDash val="solid"/>
+                      <a:round/>
+                      <a:headEnd type="none" w="med" len="med"/>
+                      <a:tailEnd type="none" w="med" len="med"/>
+                    </a:lnT>
+                    <a:lnB w="12700" cap="flat" cmpd="sng" algn="ctr">
+                      <a:solidFill>
+                        <a:srgbClr val="3C3833"/>
+                      </a:solidFill>
+                      <a:prstDash val="solid"/>
+                      <a:round/>
+                      <a:headEnd type="none" w="med" len="med"/>
+                      <a:tailEnd type="none" w="med" len="med"/>
+                    </a:lnB>
+                    <a:solidFill>
+                      <a:srgbClr val="BC5B33"/>
+                    </a:solidFill>
+                  </a:tcPr>
+                </a:tc>
+              </a:tr>
+              <a:tr h="508000">
+                <a:tc>
+                  <a:txBody>
+                    <a:bodyPr/>
+                    <a:lstStyle/>
+                    <a:p>
+                      <a:pPr indent="0" marL="0">
+                        <a:buNone/>
+                      </a:pPr>
+                      <a:r>
+                        <a:rPr lang="en-US" sz="1000" b="1" dirty="0">
+                          <a:solidFill>
+                            <a:srgbClr val="FFFFFF"/>
+                          </a:solidFill>
+                          <a:latin typeface="Calibri" pitchFamily="34" charset="0"/>
+                          <a:ea typeface="Calibri" pitchFamily="34" charset="-122"/>
+                          <a:cs typeface="Calibri" pitchFamily="34" charset="-120"/>
+                        </a:rPr>
+                        <a:t>Share price</a:t>
+                      </a:r>
+                      <a:endParaRPr lang="en-US" sz="1000" dirty="0">
+                        <a:latin typeface="Calibri" charset="0"/>
+                        <a:ea typeface="Calibri" charset="0"/>
+                        <a:cs typeface="Calibri" charset="0"/>
+                      </a:endParaRPr>
+                    </a:p>
+                  </a:txBody>
+                  <a:tcPr marL="91440" marR="91440" marT="45720" marB="45720" anchor="t">
+                    <a:lnL w="12700" cap="flat" cmpd="sng" algn="ctr">
+                      <a:solidFill>
+                        <a:srgbClr val="3C3833"/>
+                      </a:solidFill>
+                      <a:prstDash val="solid"/>
+                      <a:round/>
+                      <a:headEnd type="none" w="med" len="med"/>
+                      <a:tailEnd type="none" w="med" len="med"/>
+                    </a:lnL>
+                    <a:lnR w="12700" cap="flat" cmpd="sng" algn="ctr">
+                      <a:solidFill>
+                        <a:srgbClr val="3C3833"/>
+                      </a:solidFill>
+                      <a:prstDash val="solid"/>
+                      <a:round/>
+                      <a:headEnd type="none" w="med" len="med"/>
+                      <a:tailEnd type="none" w="med" len="med"/>
+                    </a:lnR>
+                    <a:lnT w="12700" cap="flat" cmpd="sng" algn="ctr">
+                      <a:solidFill>
+                        <a:srgbClr val="3C3833"/>
+                      </a:solidFill>
+                      <a:prstDash val="solid"/>
+                      <a:round/>
+                      <a:headEnd type="none" w="med" len="med"/>
+                      <a:tailEnd type="none" w="med" len="med"/>
+                    </a:lnT>
+                    <a:lnB w="12700" cap="flat" cmpd="sng" algn="ctr">
+                      <a:solidFill>
+                        <a:srgbClr val="3C3833"/>
+                      </a:solidFill>
+                      <a:prstDash val="solid"/>
+                      <a:round/>
+                      <a:headEnd type="none" w="med" len="med"/>
+                      <a:tailEnd type="none" w="med" len="med"/>
+                    </a:lnB>
+                    <a:solidFill>
+                      <a:srgbClr val="2E2B25"/>
+                    </a:solidFill>
+                  </a:tcPr>
+                </a:tc>
+                <a:tc>
+                  <a:txBody>
+                    <a:bodyPr/>
+                    <a:lstStyle/>
+                    <a:p>
+                      <a:pPr indent="0" marL="0">
+                        <a:buNone/>
+                      </a:pPr>
+                      <a:r>
+                        <a:rPr lang="en-US" sz="1000" dirty="0">
+                          <a:solidFill>
+                            <a:srgbClr val="E3E0D3"/>
+                          </a:solidFill>
+                          <a:latin typeface="Calibri" pitchFamily="34" charset="0"/>
+                          <a:ea typeface="Calibri" pitchFamily="34" charset="-122"/>
+                          <a:cs typeface="Calibri" pitchFamily="34" charset="-120"/>
+                        </a:rPr>
+                        <a:t>$406.11 (4 Aug 2026, stockanalysis.com)</a:t>
+                      </a:r>
+                      <a:endParaRPr lang="en-US" sz="1000" dirty="0">
+                        <a:latin typeface="Calibri" charset="0"/>
+                        <a:ea typeface="Calibri" charset="0"/>
+                        <a:cs typeface="Calibri" charset="0"/>
+                      </a:endParaRPr>
+                    </a:p>
+                  </a:txBody>
+                  <a:tcPr marL="91440" marR="91440" marT="45720" marB="45720" anchor="t">
+                    <a:lnL w="12700" cap="flat" cmpd="sng" algn="ctr">
+                      <a:solidFill>
+                        <a:srgbClr val="3C3833"/>
+                      </a:solidFill>
+                      <a:prstDash val="solid"/>
+                      <a:round/>
+                      <a:headEnd type="none" w="med" len="med"/>
+                      <a:tailEnd type="none" w="med" len="med"/>
+                    </a:lnL>
+                    <a:lnR w="12700" cap="flat" cmpd="sng" algn="ctr">
+                      <a:solidFill>
+                        <a:srgbClr val="3C3833"/>
+                      </a:solidFill>
+                      <a:prstDash val="solid"/>
+                      <a:round/>
+                      <a:headEnd type="none" w="med" len="med"/>
+                      <a:tailEnd type="none" w="med" len="med"/>
+                    </a:lnR>
+                    <a:lnT w="12700" cap="flat" cmpd="sng" algn="ctr">
+                      <a:solidFill>
+                        <a:srgbClr val="3C3833"/>
+                      </a:solidFill>
+                      <a:prstDash val="solid"/>
+                      <a:round/>
+                      <a:headEnd type="none" w="med" len="med"/>
+                      <a:tailEnd type="none" w="med" len="med"/>
+                    </a:lnT>
+                    <a:lnB w="12700" cap="flat" cmpd="sng" algn="ctr">
+                      <a:solidFill>
+                        <a:srgbClr val="3C3833"/>
+                      </a:solidFill>
+                      <a:prstDash val="solid"/>
+                      <a:round/>
+                      <a:headEnd type="none" w="med" len="med"/>
+                      <a:tailEnd type="none" w="med" len="med"/>
+                    </a:lnB>
+                    <a:solidFill>
+                      <a:srgbClr val="2E2B25"/>
+                    </a:solidFill>
+                  </a:tcPr>
+                </a:tc>
+              </a:tr>
+              <a:tr h="508000">
+                <a:tc>
+                  <a:txBody>
+                    <a:bodyPr/>
+                    <a:lstStyle/>
+                    <a:p>
+                      <a:pPr indent="0" marL="0">
+                        <a:buNone/>
+                      </a:pPr>
+                      <a:r>
+                        <a:rPr lang="en-US" sz="1000" b="1" dirty="0">
+                          <a:solidFill>
+                            <a:srgbClr val="FFFFFF"/>
+                          </a:solidFill>
+                          <a:latin typeface="Calibri" pitchFamily="34" charset="0"/>
+                          <a:ea typeface="Calibri" pitchFamily="34" charset="-122"/>
+                          <a:cs typeface="Calibri" pitchFamily="34" charset="-120"/>
+                        </a:rPr>
+                        <a:t>Shares outstanding</a:t>
+                      </a:r>
+                      <a:endParaRPr lang="en-US" sz="1000" dirty="0">
+                        <a:latin typeface="Calibri" charset="0"/>
+                        <a:ea typeface="Calibri" charset="0"/>
+                        <a:cs typeface="Calibri" charset="0"/>
+                      </a:endParaRPr>
+                    </a:p>
+                  </a:txBody>
+                  <a:tcPr marL="91440" marR="91440" marT="45720" marB="45720" anchor="t">
+                    <a:lnL w="12700" cap="flat" cmpd="sng" algn="ctr">
+                      <a:solidFill>
+                        <a:srgbClr val="3C3833"/>
+                      </a:solidFill>
+                      <a:prstDash val="solid"/>
+                      <a:round/>
+                      <a:headEnd type="none" w="med" len="med"/>
+                      <a:tailEnd type="none" w="med" len="med"/>
+                    </a:lnL>
+                    <a:lnR w="12700" cap="flat" cmpd="sng" algn="ctr">
+                      <a:solidFill>
+                        <a:srgbClr val="3C3833"/>
+                      </a:solidFill>
+                      <a:prstDash val="solid"/>
+                      <a:round/>
+                      <a:headEnd type="none" w="med" len="med"/>
+                      <a:tailEnd type="none" w="med" len="med"/>
+                    </a:lnR>
+                    <a:lnT w="12700" cap="flat" cmpd="sng" algn="ctr">
+                      <a:solidFill>
+                        <a:srgbClr val="3C3833"/>
+                      </a:solidFill>
+                      <a:prstDash val="solid"/>
+                      <a:round/>
+                      <a:headEnd type="none" w="med" len="med"/>
+                      <a:tailEnd type="none" w="med" len="med"/>
+                    </a:lnT>
+                    <a:lnB w="12700" cap="flat" cmpd="sng" algn="ctr">
+                      <a:solidFill>
+                        <a:srgbClr val="3C3833"/>
+                      </a:solidFill>
+                      <a:prstDash val="solid"/>
+                      <a:round/>
+                      <a:headEnd type="none" w="med" len="med"/>
+                      <a:tailEnd type="none" w="med" len="med"/>
+                    </a:lnB>
+                    <a:solidFill>
+                      <a:srgbClr val="2E2B25"/>
+                    </a:solidFill>
+                  </a:tcPr>
+                </a:tc>
+                <a:tc>
+                  <a:txBody>
+                    <a:bodyPr/>
+                    <a:lstStyle/>
+                    <a:p>
+                      <a:pPr indent="0" marL="0">
+                        <a:buNone/>
+                      </a:pPr>
+                      <a:r>
+                        <a:rPr lang="en-US" sz="1000" dirty="0">
+                          <a:solidFill>
+                            <a:srgbClr val="E3E0D3"/>
+                          </a:solidFill>
+                          <a:latin typeface="Calibri" pitchFamily="34" charset="0"/>
+                          <a:ea typeface="Calibri" pitchFamily="34" charset="-122"/>
+                          <a:cs typeface="Calibri" pitchFamily="34" charset="-120"/>
+                        </a:rPr>
+                        <a:t>~5,186m ADS-equivalent (25.93bn ordinary shares ÷ 5 ADS ratio — the raw 25.93bn figure from aggregators is ordinary shares, not ADS; converted for USD-per-ADS consistency with the $406.11 quote)</a:t>
+                      </a:r>
+                      <a:endParaRPr lang="en-US" sz="1000" dirty="0">
+                        <a:latin typeface="Calibri" charset="0"/>
+                        <a:ea typeface="Calibri" charset="0"/>
+                        <a:cs typeface="Calibri" charset="0"/>
+                      </a:endParaRPr>
+                    </a:p>
+                  </a:txBody>
+                  <a:tcPr marL="91440" marR="91440" marT="45720" marB="45720" anchor="t">
+                    <a:lnL w="12700" cap="flat" cmpd="sng" algn="ctr">
+                      <a:solidFill>
+                        <a:srgbClr val="3C3833"/>
+                      </a:solidFill>
+                      <a:prstDash val="solid"/>
+                      <a:round/>
+                      <a:headEnd type="none" w="med" len="med"/>
+                      <a:tailEnd type="none" w="med" len="med"/>
+                    </a:lnL>
+                    <a:lnR w="12700" cap="flat" cmpd="sng" algn="ctr">
+                      <a:solidFill>
+                        <a:srgbClr val="3C3833"/>
+                      </a:solidFill>
+                      <a:prstDash val="solid"/>
+                      <a:round/>
+                      <a:headEnd type="none" w="med" len="med"/>
+                      <a:tailEnd type="none" w="med" len="med"/>
+                    </a:lnR>
+                    <a:lnT w="12700" cap="flat" cmpd="sng" algn="ctr">
+                      <a:solidFill>
+                        <a:srgbClr val="3C3833"/>
+                      </a:solidFill>
+                      <a:prstDash val="solid"/>
+                      <a:round/>
+                      <a:headEnd type="none" w="med" len="med"/>
+                      <a:tailEnd type="none" w="med" len="med"/>
+                    </a:lnT>
+                    <a:lnB w="12700" cap="flat" cmpd="sng" algn="ctr">
+                      <a:solidFill>
+                        <a:srgbClr val="3C3833"/>
+                      </a:solidFill>
+                      <a:prstDash val="solid"/>
+                      <a:round/>
+                      <a:headEnd type="none" w="med" len="med"/>
+                      <a:tailEnd type="none" w="med" len="med"/>
+                    </a:lnB>
+                    <a:solidFill>
+                      <a:srgbClr val="2E2B25"/>
+                    </a:solidFill>
+                  </a:tcPr>
+                </a:tc>
+              </a:tr>
+              <a:tr h="508000">
+                <a:tc>
+                  <a:txBody>
+                    <a:bodyPr/>
+                    <a:lstStyle/>
+                    <a:p>
+                      <a:pPr indent="0" marL="0">
+                        <a:buNone/>
+                      </a:pPr>
+                      <a:r>
+                        <a:rPr lang="en-US" sz="1000" b="1" dirty="0">
+                          <a:solidFill>
+                            <a:srgbClr val="FFFFFF"/>
+                          </a:solidFill>
+                          <a:latin typeface="Calibri" pitchFamily="34" charset="0"/>
+                          <a:ea typeface="Calibri" pitchFamily="34" charset="-122"/>
+                          <a:cs typeface="Calibri" pitchFamily="34" charset="-120"/>
+                        </a:rPr>
+                        <a:t>Net debt / net cash</a:t>
+                      </a:r>
+                      <a:endParaRPr lang="en-US" sz="1000" dirty="0">
+                        <a:latin typeface="Calibri" charset="0"/>
+                        <a:ea typeface="Calibri" charset="0"/>
+                        <a:cs typeface="Calibri" charset="0"/>
+                      </a:endParaRPr>
+                    </a:p>
+                  </a:txBody>
+                  <a:tcPr marL="91440" marR="91440" marT="45720" marB="45720" anchor="t">
+                    <a:lnL w="12700" cap="flat" cmpd="sng" algn="ctr">
+                      <a:solidFill>
+                        <a:srgbClr val="3C3833"/>
+                      </a:solidFill>
+                      <a:prstDash val="solid"/>
+                      <a:round/>
+                      <a:headEnd type="none" w="med" len="med"/>
+                      <a:tailEnd type="none" w="med" len="med"/>
+                    </a:lnL>
+                    <a:lnR w="12700" cap="flat" cmpd="sng" algn="ctr">
+                      <a:solidFill>
+                        <a:srgbClr val="3C3833"/>
+                      </a:solidFill>
+                      <a:prstDash val="solid"/>
+                      <a:round/>
+                      <a:headEnd type="none" w="med" len="med"/>
+                      <a:tailEnd type="none" w="med" len="med"/>
+                    </a:lnR>
+                    <a:lnT w="12700" cap="flat" cmpd="sng" algn="ctr">
+                      <a:solidFill>
+                        <a:srgbClr val="3C3833"/>
+                      </a:solidFill>
+                      <a:prstDash val="solid"/>
+                      <a:round/>
+                      <a:headEnd type="none" w="med" len="med"/>
+                      <a:tailEnd type="none" w="med" len="med"/>
+                    </a:lnT>
+                    <a:lnB w="12700" cap="flat" cmpd="sng" algn="ctr">
+                      <a:solidFill>
+                        <a:srgbClr val="3C3833"/>
+                      </a:solidFill>
+                      <a:prstDash val="solid"/>
+                      <a:round/>
+                      <a:headEnd type="none" w="med" len="med"/>
+                      <a:tailEnd type="none" w="med" len="med"/>
+                    </a:lnB>
+                    <a:solidFill>
+                      <a:srgbClr val="2E2B25"/>
+                    </a:solidFill>
+                  </a:tcPr>
+                </a:tc>
+                <a:tc>
+                  <a:txBody>
+                    <a:bodyPr/>
+                    <a:lstStyle/>
+                    <a:p>
+                      <a:pPr indent="0" marL="0">
+                        <a:buNone/>
+                      </a:pPr>
+                      <a:r>
+                        <a:rPr lang="en-US" sz="1000" dirty="0">
+                          <a:solidFill>
+                            <a:srgbClr val="E3E0D3"/>
+                          </a:solidFill>
+                          <a:latin typeface="Calibri" pitchFamily="34" charset="0"/>
+                          <a:ea typeface="Calibri" pitchFamily="34" charset="-122"/>
+                          <a:cs typeface="Calibri" pitchFamily="34" charset="-120"/>
+                        </a:rPr>
+                        <a:t>Net cash ~$83bn (NT$3,518bn cash &amp; securities less NT$864bn long-term debt = ~NT$2,654bn, converted at ~NT$32/$) — TSMC Q2 2026 Form 6-K</a:t>
+                      </a:r>
+                      <a:endParaRPr lang="en-US" sz="1000" dirty="0">
+                        <a:latin typeface="Calibri" charset="0"/>
+                        <a:ea typeface="Calibri" charset="0"/>
+                        <a:cs typeface="Calibri" charset="0"/>
+                      </a:endParaRPr>
+                    </a:p>
+                  </a:txBody>
+                  <a:tcPr marL="91440" marR="91440" marT="45720" marB="45720" anchor="t">
+                    <a:lnL w="12700" cap="flat" cmpd="sng" algn="ctr">
+                      <a:solidFill>
+                        <a:srgbClr val="3C3833"/>
+                      </a:solidFill>
+                      <a:prstDash val="solid"/>
+                      <a:round/>
+                      <a:headEnd type="none" w="med" len="med"/>
+                      <a:tailEnd type="none" w="med" len="med"/>
+                    </a:lnL>
+                    <a:lnR w="12700" cap="flat" cmpd="sng" algn="ctr">
+                      <a:solidFill>
+                        <a:srgbClr val="3C3833"/>
+                      </a:solidFill>
+                      <a:prstDash val="solid"/>
+                      <a:round/>
+                      <a:headEnd type="none" w="med" len="med"/>
+                      <a:tailEnd type="none" w="med" len="med"/>
+                    </a:lnR>
+                    <a:lnT w="12700" cap="flat" cmpd="sng" algn="ctr">
+                      <a:solidFill>
+                        <a:srgbClr val="3C3833"/>
+                      </a:solidFill>
+                      <a:prstDash val="solid"/>
+                      <a:round/>
+                      <a:headEnd type="none" w="med" len="med"/>
+                      <a:tailEnd type="none" w="med" len="med"/>
+                    </a:lnT>
+                    <a:lnB w="12700" cap="flat" cmpd="sng" algn="ctr">
+                      <a:solidFill>
+                        <a:srgbClr val="3C3833"/>
+                      </a:solidFill>
+                      <a:prstDash val="solid"/>
+                      <a:round/>
+                      <a:headEnd type="none" w="med" len="med"/>
+                      <a:tailEnd type="none" w="med" len="med"/>
+                    </a:lnB>
+                    <a:solidFill>
+                      <a:srgbClr val="2E2B25"/>
+                    </a:solidFill>
+                  </a:tcPr>
+                </a:tc>
+              </a:tr>
+              <a:tr h="508000">
+                <a:tc>
+                  <a:txBody>
+                    <a:bodyPr/>
+                    <a:lstStyle/>
+                    <a:p>
+                      <a:pPr indent="0" marL="0">
+                        <a:buNone/>
+                      </a:pPr>
+                      <a:r>
+                        <a:rPr lang="en-US" sz="1000" b="1" dirty="0">
+                          <a:solidFill>
+                            <a:srgbClr val="FFFFFF"/>
+                          </a:solidFill>
+                          <a:latin typeface="Calibri" pitchFamily="34" charset="0"/>
+                          <a:ea typeface="Calibri" pitchFamily="34" charset="-122"/>
+                          <a:cs typeface="Calibri" pitchFamily="34" charset="-120"/>
+                        </a:rPr>
+                        <a:t>Beta</a:t>
+                      </a:r>
+                      <a:endParaRPr lang="en-US" sz="1000" dirty="0">
+                        <a:latin typeface="Calibri" charset="0"/>
+                        <a:ea typeface="Calibri" charset="0"/>
+                        <a:cs typeface="Calibri" charset="0"/>
+                      </a:endParaRPr>
+                    </a:p>
+                  </a:txBody>
+                  <a:tcPr marL="91440" marR="91440" marT="45720" marB="45720" anchor="t">
+                    <a:lnL w="12700" cap="flat" cmpd="sng" algn="ctr">
+                      <a:solidFill>
+                        <a:srgbClr val="3C3833"/>
+                      </a:solidFill>
+                      <a:prstDash val="solid"/>
+                      <a:round/>
+                      <a:headEnd type="none" w="med" len="med"/>
+                      <a:tailEnd type="none" w="med" len="med"/>
+                    </a:lnL>
+                    <a:lnR w="12700" cap="flat" cmpd="sng" algn="ctr">
+                      <a:solidFill>
+                        <a:srgbClr val="3C3833"/>
+                      </a:solidFill>
+                      <a:prstDash val="solid"/>
+                      <a:round/>
+                      <a:headEnd type="none" w="med" len="med"/>
+                      <a:tailEnd type="none" w="med" len="med"/>
+                    </a:lnR>
+                    <a:lnT w="12700" cap="flat" cmpd="sng" algn="ctr">
+                      <a:solidFill>
+                        <a:srgbClr val="3C3833"/>
+                      </a:solidFill>
+                      <a:prstDash val="solid"/>
+                      <a:round/>
+                      <a:headEnd type="none" w="med" len="med"/>
+                      <a:tailEnd type="none" w="med" len="med"/>
+                    </a:lnT>
+                    <a:lnB w="12700" cap="flat" cmpd="sng" algn="ctr">
+                      <a:solidFill>
+                        <a:srgbClr val="3C3833"/>
+                      </a:solidFill>
+                      <a:prstDash val="solid"/>
+                      <a:round/>
+                      <a:headEnd type="none" w="med" len="med"/>
+                      <a:tailEnd type="none" w="med" len="med"/>
+                    </a:lnB>
+                    <a:solidFill>
+                      <a:srgbClr val="2E2B25"/>
+                    </a:solidFill>
+                  </a:tcPr>
+                </a:tc>
+                <a:tc>
+                  <a:txBody>
+                    <a:bodyPr/>
+                    <a:lstStyle/>
+                    <a:p>
+                      <a:pPr indent="0" marL="0">
+                        <a:buNone/>
+                      </a:pPr>
+                      <a:r>
+                        <a:rPr lang="en-US" sz="1000" dirty="0">
+                          <a:solidFill>
+                            <a:srgbClr val="E3E0D3"/>
+                          </a:solidFill>
+                          <a:latin typeface="Calibri" pitchFamily="34" charset="0"/>
+                          <a:ea typeface="Calibri" pitchFamily="34" charset="-122"/>
+                          <a:cs typeface="Calibri" pitchFamily="34" charset="-120"/>
+                        </a:rPr>
+                        <a:t>1.25 (stockanalysis.com)</a:t>
+                      </a:r>
+                      <a:endParaRPr lang="en-US" sz="1000" dirty="0">
+                        <a:latin typeface="Calibri" charset="0"/>
+                        <a:ea typeface="Calibri" charset="0"/>
+                        <a:cs typeface="Calibri" charset="0"/>
+                      </a:endParaRPr>
+                    </a:p>
+                  </a:txBody>
+                  <a:tcPr marL="91440" marR="91440" marT="45720" marB="45720" anchor="t">
+                    <a:lnL w="12700" cap="flat" cmpd="sng" algn="ctr">
+                      <a:solidFill>
+                        <a:srgbClr val="3C3833"/>
+                      </a:solidFill>
+                      <a:prstDash val="solid"/>
+                      <a:round/>
+                      <a:headEnd type="none" w="med" len="med"/>
+                      <a:tailEnd type="none" w="med" len="med"/>
+                    </a:lnL>
+                    <a:lnR w="12700" cap="flat" cmpd="sng" algn="ctr">
+                      <a:solidFill>
+                        <a:srgbClr val="3C3833"/>
+                      </a:solidFill>
+                      <a:prstDash val="solid"/>
+                      <a:round/>
+                      <a:headEnd type="none" w="med" len="med"/>
+                      <a:tailEnd type="none" w="med" len="med"/>
+                    </a:lnR>
+                    <a:lnT w="12700" cap="flat" cmpd="sng" algn="ctr">
+                      <a:solidFill>
+                        <a:srgbClr val="3C3833"/>
+                      </a:solidFill>
+                      <a:prstDash val="solid"/>
+                      <a:round/>
+                      <a:headEnd type="none" w="med" len="med"/>
+                      <a:tailEnd type="none" w="med" len="med"/>
+                    </a:lnT>
+                    <a:lnB w="12700" cap="flat" cmpd="sng" algn="ctr">
+                      <a:solidFill>
+                        <a:srgbClr val="3C3833"/>
+                      </a:solidFill>
+                      <a:prstDash val="solid"/>
+                      <a:round/>
+                      <a:headEnd type="none" w="med" len="med"/>
+                      <a:tailEnd type="none" w="med" len="med"/>
+                    </a:lnB>
+                    <a:solidFill>
+                      <a:srgbClr val="2E2B25"/>
+                    </a:solidFill>
+                  </a:tcPr>
+                </a:tc>
+              </a:tr>
+              <a:tr h="508000">
+                <a:tc>
+                  <a:txBody>
+                    <a:bodyPr/>
+                    <a:lstStyle/>
+                    <a:p>
+                      <a:pPr indent="0" marL="0">
+                        <a:buNone/>
+                      </a:pPr>
+                      <a:r>
+                        <a:rPr lang="en-US" sz="1000" b="1" dirty="0">
+                          <a:solidFill>
+                            <a:srgbClr val="FFFFFF"/>
+                          </a:solidFill>
+                          <a:latin typeface="Calibri" pitchFamily="34" charset="0"/>
+                          <a:ea typeface="Calibri" pitchFamily="34" charset="-122"/>
+                          <a:cs typeface="Calibri" pitchFamily="34" charset="-120"/>
+                        </a:rPr>
+                        <a:t>Risk-free rate</a:t>
+                      </a:r>
+                      <a:endParaRPr lang="en-US" sz="1000" dirty="0">
+                        <a:latin typeface="Calibri" charset="0"/>
+                        <a:ea typeface="Calibri" charset="0"/>
+                        <a:cs typeface="Calibri" charset="0"/>
+                      </a:endParaRPr>
+                    </a:p>
+                  </a:txBody>
+                  <a:tcPr marL="91440" marR="91440" marT="45720" marB="45720" anchor="t">
+                    <a:lnL w="12700" cap="flat" cmpd="sng" algn="ctr">
+                      <a:solidFill>
+                        <a:srgbClr val="3C3833"/>
+                      </a:solidFill>
+                      <a:prstDash val="solid"/>
+                      <a:round/>
+                      <a:headEnd type="none" w="med" len="med"/>
+                      <a:tailEnd type="none" w="med" len="med"/>
+                    </a:lnL>
+                    <a:lnR w="12700" cap="flat" cmpd="sng" algn="ctr">
+                      <a:solidFill>
+                        <a:srgbClr val="3C3833"/>
+                      </a:solidFill>
+                      <a:prstDash val="solid"/>
+                      <a:round/>
+                      <a:headEnd type="none" w="med" len="med"/>
+                      <a:tailEnd type="none" w="med" len="med"/>
+                    </a:lnR>
+                    <a:lnT w="12700" cap="flat" cmpd="sng" algn="ctr">
+                      <a:solidFill>
+                        <a:srgbClr val="3C3833"/>
+                      </a:solidFill>
+                      <a:prstDash val="solid"/>
+                      <a:round/>
+                      <a:headEnd type="none" w="med" len="med"/>
+                      <a:tailEnd type="none" w="med" len="med"/>
+                    </a:lnT>
+                    <a:lnB w="12700" cap="flat" cmpd="sng" algn="ctr">
+                      <a:solidFill>
+                        <a:srgbClr val="3C3833"/>
+                      </a:solidFill>
+                      <a:prstDash val="solid"/>
+                      <a:round/>
+                      <a:headEnd type="none" w="med" len="med"/>
+                      <a:tailEnd type="none" w="med" len="med"/>
+                    </a:lnB>
+                    <a:solidFill>
+                      <a:srgbClr val="2E2B25"/>
+                    </a:solidFill>
+                  </a:tcPr>
+                </a:tc>
+                <a:tc>
+                  <a:txBody>
+                    <a:bodyPr/>
+                    <a:lstStyle/>
+                    <a:p>
+                      <a:pPr indent="0" marL="0">
+                        <a:buNone/>
+                      </a:pPr>
+                      <a:r>
+                        <a:rPr lang="en-US" sz="1000" dirty="0">
+                          <a:solidFill>
+                            <a:srgbClr val="E3E0D3"/>
+                          </a:solidFill>
+                          <a:latin typeface="Calibri" pitchFamily="34" charset="0"/>
+                          <a:ea typeface="Calibri" pitchFamily="34" charset="-122"/>
+                          <a:cs typeface="Calibri" pitchFamily="34" charset="-120"/>
+                        </a:rPr>
+                        <a:t>US 10-year Treasury yield, 4.62% (5 Aug 2026) — used since TSM trades as a USD-denominated NYSE ADR</a:t>
+                      </a:r>
+                      <a:endParaRPr lang="en-US" sz="1000" dirty="0">
+                        <a:latin typeface="Calibri" charset="0"/>
+                        <a:ea typeface="Calibri" charset="0"/>
+                        <a:cs typeface="Calibri" charset="0"/>
+                      </a:endParaRPr>
+                    </a:p>
+                  </a:txBody>
+                  <a:tcPr marL="91440" marR="91440" marT="45720" marB="45720" anchor="t">
+                    <a:lnL w="12700" cap="flat" cmpd="sng" algn="ctr">
+                      <a:solidFill>
+                        <a:srgbClr val="3C3833"/>
+                      </a:solidFill>
+                      <a:prstDash val="solid"/>
+                      <a:round/>
+                      <a:headEnd type="none" w="med" len="med"/>
+                      <a:tailEnd type="none" w="med" len="med"/>
+                    </a:lnL>
+                    <a:lnR w="12700" cap="flat" cmpd="sng" algn="ctr">
+                      <a:solidFill>
+                        <a:srgbClr val="3C3833"/>
+                      </a:solidFill>
+                      <a:prstDash val="solid"/>
+                      <a:round/>
+                      <a:headEnd type="none" w="med" len="med"/>
+                      <a:tailEnd type="none" w="med" len="med"/>
+                    </a:lnR>
+                    <a:lnT w="12700" cap="flat" cmpd="sng" algn="ctr">
+                      <a:solidFill>
+                        <a:srgbClr val="3C3833"/>
+                      </a:solidFill>
+                      <a:prstDash val="solid"/>
+                      <a:round/>
+                      <a:headEnd type="none" w="med" len="med"/>
+                      <a:tailEnd type="none" w="med" len="med"/>
+                    </a:lnT>
+                    <a:lnB w="12700" cap="flat" cmpd="sng" algn="ctr">
+                      <a:solidFill>
+                        <a:srgbClr val="3C3833"/>
+                      </a:solidFill>
+                      <a:prstDash val="solid"/>
+                      <a:round/>
+                      <a:headEnd type="none" w="med" len="med"/>
+                      <a:tailEnd type="none" w="med" len="med"/>
+                    </a:lnB>
+                    <a:solidFill>
+                      <a:srgbClr val="2E2B25"/>
+                    </a:solidFill>
+                  </a:tcPr>
+                </a:tc>
+              </a:tr>
+              <a:tr h="508000">
+                <a:tc>
+                  <a:txBody>
+                    <a:bodyPr/>
+                    <a:lstStyle/>
+                    <a:p>
+                      <a:pPr indent="0" marL="0">
+                        <a:buNone/>
+                      </a:pPr>
+                      <a:r>
+                        <a:rPr lang="en-US" sz="1000" b="1" dirty="0">
+                          <a:solidFill>
+                            <a:srgbClr val="FFFFFF"/>
+                          </a:solidFill>
+                          <a:latin typeface="Calibri" pitchFamily="34" charset="0"/>
+                          <a:ea typeface="Calibri" pitchFamily="34" charset="-122"/>
+                          <a:cs typeface="Calibri" pitchFamily="34" charset="-120"/>
+                        </a:rPr>
+                        <a:t>FY0 revenue</a:t>
+                      </a:r>
+                      <a:endParaRPr lang="en-US" sz="1000" dirty="0">
+                        <a:latin typeface="Calibri" charset="0"/>
+                        <a:ea typeface="Calibri" charset="0"/>
+                        <a:cs typeface="Calibri" charset="0"/>
+                      </a:endParaRPr>
+                    </a:p>
+                  </a:txBody>
+                  <a:tcPr marL="91440" marR="91440" marT="45720" marB="45720" anchor="t">
+                    <a:lnL w="12700" cap="flat" cmpd="sng" algn="ctr">
+                      <a:solidFill>
+                        <a:srgbClr val="3C3833"/>
+                      </a:solidFill>
+                      <a:prstDash val="solid"/>
+                      <a:round/>
+                      <a:headEnd type="none" w="med" len="med"/>
+                      <a:tailEnd type="none" w="med" len="med"/>
+                    </a:lnL>
+                    <a:lnR w="12700" cap="flat" cmpd="sng" algn="ctr">
+                      <a:solidFill>
+                        <a:srgbClr val="3C3833"/>
+                      </a:solidFill>
+                      <a:prstDash val="solid"/>
+                      <a:round/>
+                      <a:headEnd type="none" w="med" len="med"/>
+                      <a:tailEnd type="none" w="med" len="med"/>
+                    </a:lnR>
+                    <a:lnT w="12700" cap="flat" cmpd="sng" algn="ctr">
+                      <a:solidFill>
+                        <a:srgbClr val="3C3833"/>
+                      </a:solidFill>
+                      <a:prstDash val="solid"/>
+                      <a:round/>
+                      <a:headEnd type="none" w="med" len="med"/>
+                      <a:tailEnd type="none" w="med" len="med"/>
+                    </a:lnT>
+                    <a:lnB w="12700" cap="flat" cmpd="sng" algn="ctr">
+                      <a:solidFill>
+                        <a:srgbClr val="3C3833"/>
+                      </a:solidFill>
+                      <a:prstDash val="solid"/>
+                      <a:round/>
+                      <a:headEnd type="none" w="med" len="med"/>
+                      <a:tailEnd type="none" w="med" len="med"/>
+                    </a:lnB>
+                    <a:solidFill>
+                      <a:srgbClr val="2E2B25"/>
+                    </a:solidFill>
+                  </a:tcPr>
+                </a:tc>
+                <a:tc>
+                  <a:txBody>
+                    <a:bodyPr/>
+                    <a:lstStyle/>
+                    <a:p>
+                      <a:pPr indent="0" marL="0">
+                        <a:buNone/>
+                      </a:pPr>
+                      <a:r>
+                        <a:rPr lang="en-US" sz="1000" dirty="0">
+                          <a:solidFill>
+                            <a:srgbClr val="E3E0D3"/>
+                          </a:solidFill>
+                          <a:latin typeface="Calibri" pitchFamily="34" charset="0"/>
+                          <a:ea typeface="Calibri" pitchFamily="34" charset="-122"/>
+                          <a:cs typeface="Calibri" pitchFamily="34" charset="-120"/>
+                        </a:rPr>
+                        <a:t>FY2026E ~$160bn, annualized from Q2 2026 revenue of $40.2bn against full-year guidance of growth 'slightly above 40%' YoY — this is a MODELED annualization, not a company-stated full-year dollar figure</a:t>
+                      </a:r>
+                      <a:endParaRPr lang="en-US" sz="1000" dirty="0">
+                        <a:latin typeface="Calibri" charset="0"/>
+                        <a:ea typeface="Calibri" charset="0"/>
+                        <a:cs typeface="Calibri" charset="0"/>
+                      </a:endParaRPr>
+                    </a:p>
+                  </a:txBody>
+                  <a:tcPr marL="91440" marR="91440" marT="45720" marB="45720" anchor="t">
+                    <a:lnL w="12700" cap="flat" cmpd="sng" algn="ctr">
+                      <a:solidFill>
+                        <a:srgbClr val="3C3833"/>
+                      </a:solidFill>
+                      <a:prstDash val="solid"/>
+                      <a:round/>
+                      <a:headEnd type="none" w="med" len="med"/>
+                      <a:tailEnd type="none" w="med" len="med"/>
+                    </a:lnL>
+                    <a:lnR w="12700" cap="flat" cmpd="sng" algn="ctr">
+                      <a:solidFill>
+                        <a:srgbClr val="3C3833"/>
+                      </a:solidFill>
+                      <a:prstDash val="solid"/>
+                      <a:round/>
+                      <a:headEnd type="none" w="med" len="med"/>
+                      <a:tailEnd type="none" w="med" len="med"/>
+                    </a:lnR>
+                    <a:lnT w="12700" cap="flat" cmpd="sng" algn="ctr">
+                      <a:solidFill>
+                        <a:srgbClr val="3C3833"/>
+                      </a:solidFill>
+                      <a:prstDash val="solid"/>
+                      <a:round/>
+                      <a:headEnd type="none" w="med" len="med"/>
+                      <a:tailEnd type="none" w="med" len="med"/>
+                    </a:lnT>
+                    <a:lnB w="12700" cap="flat" cmpd="sng" algn="ctr">
+                      <a:solidFill>
+                        <a:srgbClr val="3C3833"/>
+                      </a:solidFill>
+                      <a:prstDash val="solid"/>
+                      <a:round/>
+                      <a:headEnd type="none" w="med" len="med"/>
+                      <a:tailEnd type="none" w="med" len="med"/>
+                    </a:lnB>
+                    <a:solidFill>
+                      <a:srgbClr val="2E2B25"/>
+                    </a:solidFill>
+                  </a:tcPr>
+                </a:tc>
+              </a:tr>
+              <a:tr h="508000">
+                <a:tc>
+                  <a:txBody>
+                    <a:bodyPr/>
+                    <a:lstStyle/>
+                    <a:p>
+                      <a:pPr indent="0" marL="0">
+                        <a:buNone/>
+                      </a:pPr>
+                      <a:r>
+                        <a:rPr lang="en-US" sz="1000" b="1" dirty="0">
+                          <a:solidFill>
+                            <a:srgbClr val="FFFFFF"/>
+                          </a:solidFill>
+                          <a:latin typeface="Calibri" pitchFamily="34" charset="0"/>
+                          <a:ea typeface="Calibri" pitchFamily="34" charset="-122"/>
+                          <a:cs typeface="Calibri" pitchFamily="34" charset="-120"/>
+                        </a:rPr>
+                        <a:t>FY0 operating margin</a:t>
+                      </a:r>
+                      <a:endParaRPr lang="en-US" sz="1000" dirty="0">
+                        <a:latin typeface="Calibri" charset="0"/>
+                        <a:ea typeface="Calibri" charset="0"/>
+                        <a:cs typeface="Calibri" charset="0"/>
+                      </a:endParaRPr>
+                    </a:p>
+                  </a:txBody>
+                  <a:tcPr marL="91440" marR="91440" marT="45720" marB="45720" anchor="t">
+                    <a:lnL w="12700" cap="flat" cmpd="sng" algn="ctr">
+                      <a:solidFill>
+                        <a:srgbClr val="3C3833"/>
+                      </a:solidFill>
+                      <a:prstDash val="solid"/>
+                      <a:round/>
+                      <a:headEnd type="none" w="med" len="med"/>
+                      <a:tailEnd type="none" w="med" len="med"/>
+                    </a:lnL>
+                    <a:lnR w="12700" cap="flat" cmpd="sng" algn="ctr">
+                      <a:solidFill>
+                        <a:srgbClr val="3C3833"/>
+                      </a:solidFill>
+                      <a:prstDash val="solid"/>
+                      <a:round/>
+                      <a:headEnd type="none" w="med" len="med"/>
+                      <a:tailEnd type="none" w="med" len="med"/>
+                    </a:lnR>
+                    <a:lnT w="12700" cap="flat" cmpd="sng" algn="ctr">
+                      <a:solidFill>
+                        <a:srgbClr val="3C3833"/>
+                      </a:solidFill>
+                      <a:prstDash val="solid"/>
+                      <a:round/>
+                      <a:headEnd type="none" w="med" len="med"/>
+                      <a:tailEnd type="none" w="med" len="med"/>
+                    </a:lnT>
+                    <a:lnB w="12700" cap="flat" cmpd="sng" algn="ctr">
+                      <a:solidFill>
+                        <a:srgbClr val="3C3833"/>
+                      </a:solidFill>
+                      <a:prstDash val="solid"/>
+                      <a:round/>
+                      <a:headEnd type="none" w="med" len="med"/>
+                      <a:tailEnd type="none" w="med" len="med"/>
+                    </a:lnB>
+                    <a:solidFill>
+                      <a:srgbClr val="2E2B25"/>
+                    </a:solidFill>
+                  </a:tcPr>
+                </a:tc>
+                <a:tc>
+                  <a:txBody>
+                    <a:bodyPr/>
+                    <a:lstStyle/>
+                    <a:p>
+                      <a:pPr indent="0" marL="0">
+                        <a:buNone/>
+                      </a:pPr>
+                      <a:r>
+                        <a:rPr lang="en-US" sz="1000" dirty="0">
+                          <a:solidFill>
+                            <a:srgbClr val="E3E0D3"/>
+                          </a:solidFill>
+                          <a:latin typeface="Calibri" pitchFamily="34" charset="0"/>
+                          <a:ea typeface="Calibri" pitchFamily="34" charset="-122"/>
+                          <a:cs typeface="Calibri" pitchFamily="34" charset="-120"/>
+                        </a:rPr>
+                        <a:t>~57.5%, midpoint of Q2/Q3 2026 guided operating margin range (56.5-58.5% / 56-58%)</a:t>
+                      </a:r>
+                      <a:endParaRPr lang="en-US" sz="1000" dirty="0">
+                        <a:latin typeface="Calibri" charset="0"/>
+                        <a:ea typeface="Calibri" charset="0"/>
+                        <a:cs typeface="Calibri" charset="0"/>
+                      </a:endParaRPr>
+                    </a:p>
+                  </a:txBody>
+                  <a:tcPr marL="91440" marR="91440" marT="45720" marB="45720" anchor="t">
+                    <a:lnL w="12700" cap="flat" cmpd="sng" algn="ctr">
+                      <a:solidFill>
+                        <a:srgbClr val="3C3833"/>
+                      </a:solidFill>
+                      <a:prstDash val="solid"/>
+                      <a:round/>
+                      <a:headEnd type="none" w="med" len="med"/>
+                      <a:tailEnd type="none" w="med" len="med"/>
+                    </a:lnL>
+                    <a:lnR w="12700" cap="flat" cmpd="sng" algn="ctr">
+                      <a:solidFill>
+                        <a:srgbClr val="3C3833"/>
+                      </a:solidFill>
+                      <a:prstDash val="solid"/>
+                      <a:round/>
+                      <a:headEnd type="none" w="med" len="med"/>
+                      <a:tailEnd type="none" w="med" len="med"/>
+                    </a:lnR>
+                    <a:lnT w="12700" cap="flat" cmpd="sng" algn="ctr">
+                      <a:solidFill>
+                        <a:srgbClr val="3C3833"/>
+                      </a:solidFill>
+                      <a:prstDash val="solid"/>
+                      <a:round/>
+                      <a:headEnd type="none" w="med" len="med"/>
+                      <a:tailEnd type="none" w="med" len="med"/>
+                    </a:lnT>
+                    <a:lnB w="12700" cap="flat" cmpd="sng" algn="ctr">
+                      <a:solidFill>
+                        <a:srgbClr val="3C3833"/>
+                      </a:solidFill>
+                      <a:prstDash val="solid"/>
+                      <a:round/>
+                      <a:headEnd type="none" w="med" len="med"/>
+                      <a:tailEnd type="none" w="med" len="med"/>
+                    </a:lnB>
+                    <a:solidFill>
+                      <a:srgbClr val="2E2B25"/>
+                    </a:solidFill>
+                  </a:tcPr>
+                </a:tc>
+              </a:tr>
+              <a:tr h="508000">
+                <a:tc>
+                  <a:txBody>
+                    <a:bodyPr/>
+                    <a:lstStyle/>
+                    <a:p>
+                      <a:pPr indent="0" marL="0">
+                        <a:buNone/>
+                      </a:pPr>
+                      <a:r>
+                        <a:rPr lang="en-US" sz="1000" b="1" dirty="0">
+                          <a:solidFill>
+                            <a:srgbClr val="FFFFFF"/>
+                          </a:solidFill>
+                          <a:latin typeface="Calibri" pitchFamily="34" charset="0"/>
+                          <a:ea typeface="Calibri" pitchFamily="34" charset="-122"/>
+                          <a:cs typeface="Calibri" pitchFamily="34" charset="-120"/>
+                        </a:rPr>
+                        <a:t>Revenue growth path</a:t>
+                      </a:r>
+                      <a:endParaRPr lang="en-US" sz="1000" dirty="0">
+                        <a:latin typeface="Calibri" charset="0"/>
+                        <a:ea typeface="Calibri" charset="0"/>
+                        <a:cs typeface="Calibri" charset="0"/>
+                      </a:endParaRPr>
+                    </a:p>
+                  </a:txBody>
+                  <a:tcPr marL="91440" marR="91440" marT="45720" marB="45720" anchor="t">
+                    <a:lnL w="12700" cap="flat" cmpd="sng" algn="ctr">
+                      <a:solidFill>
+                        <a:srgbClr val="3C3833"/>
+                      </a:solidFill>
+                      <a:prstDash val="solid"/>
+                      <a:round/>
+                      <a:headEnd type="none" w="med" len="med"/>
+                      <a:tailEnd type="none" w="med" len="med"/>
+                    </a:lnL>
+                    <a:lnR w="12700" cap="flat" cmpd="sng" algn="ctr">
+                      <a:solidFill>
+                        <a:srgbClr val="3C3833"/>
+                      </a:solidFill>
+                      <a:prstDash val="solid"/>
+                      <a:round/>
+                      <a:headEnd type="none" w="med" len="med"/>
+                      <a:tailEnd type="none" w="med" len="med"/>
+                    </a:lnR>
+                    <a:lnT w="12700" cap="flat" cmpd="sng" algn="ctr">
+                      <a:solidFill>
+                        <a:srgbClr val="3C3833"/>
+                      </a:solidFill>
+                      <a:prstDash val="solid"/>
+                      <a:round/>
+                      <a:headEnd type="none" w="med" len="med"/>
+                      <a:tailEnd type="none" w="med" len="med"/>
+                    </a:lnT>
+                    <a:lnB w="12700" cap="flat" cmpd="sng" algn="ctr">
+                      <a:solidFill>
+                        <a:srgbClr val="3C3833"/>
+                      </a:solidFill>
+                      <a:prstDash val="solid"/>
+                      <a:round/>
+                      <a:headEnd type="none" w="med" len="med"/>
+                      <a:tailEnd type="none" w="med" len="med"/>
+                    </a:lnB>
+                    <a:solidFill>
+                      <a:srgbClr val="2E2B25"/>
+                    </a:solidFill>
+                  </a:tcPr>
+                </a:tc>
+                <a:tc>
+                  <a:txBody>
+                    <a:bodyPr/>
+                    <a:lstStyle/>
+                    <a:p>
+                      <a:pPr indent="0" marL="0">
+                        <a:buNone/>
+                      </a:pPr>
+                      <a:r>
+                        <a:rPr lang="en-US" sz="1000" dirty="0">
+                          <a:solidFill>
+                            <a:srgbClr val="E3E0D3"/>
+                          </a:solidFill>
+                          <a:latin typeface="Calibri" pitchFamily="34" charset="0"/>
+                          <a:ea typeface="Calibri" pitchFamily="34" charset="-122"/>
+                          <a:cs typeface="Calibri" pitchFamily="34" charset="-120"/>
+                        </a:rPr>
+                        <a:t>Y1 continues the &gt;40%-guided 2026 pace annualizing down; tapering as AI-accelerator demand normalizes off an extraordinary base and HPC mix (66% of wafer revenue) matures</a:t>
+                      </a:r>
+                      <a:endParaRPr lang="en-US" sz="1000" dirty="0">
+                        <a:latin typeface="Calibri" charset="0"/>
+                        <a:ea typeface="Calibri" charset="0"/>
+                        <a:cs typeface="Calibri" charset="0"/>
+                      </a:endParaRPr>
+                    </a:p>
+                  </a:txBody>
+                  <a:tcPr marL="91440" marR="91440" marT="45720" marB="45720" anchor="t">
+                    <a:lnL w="12700" cap="flat" cmpd="sng" algn="ctr">
+                      <a:solidFill>
+                        <a:srgbClr val="3C3833"/>
+                      </a:solidFill>
+                      <a:prstDash val="solid"/>
+                      <a:round/>
+                      <a:headEnd type="none" w="med" len="med"/>
+                      <a:tailEnd type="none" w="med" len="med"/>
+                    </a:lnL>
+                    <a:lnR w="12700" cap="flat" cmpd="sng" algn="ctr">
+                      <a:solidFill>
+                        <a:srgbClr val="3C3833"/>
+                      </a:solidFill>
+                      <a:prstDash val="solid"/>
+                      <a:round/>
+                      <a:headEnd type="none" w="med" len="med"/>
+                      <a:tailEnd type="none" w="med" len="med"/>
+                    </a:lnR>
+                    <a:lnT w="12700" cap="flat" cmpd="sng" algn="ctr">
+                      <a:solidFill>
+                        <a:srgbClr val="3C3833"/>
+                      </a:solidFill>
+                      <a:prstDash val="solid"/>
+                      <a:round/>
+                      <a:headEnd type="none" w="med" len="med"/>
+                      <a:tailEnd type="none" w="med" len="med"/>
+                    </a:lnT>
+                    <a:lnB w="12700" cap="flat" cmpd="sng" algn="ctr">
+                      <a:solidFill>
+                        <a:srgbClr val="3C3833"/>
+                      </a:solidFill>
+                      <a:prstDash val="solid"/>
+                      <a:round/>
+                      <a:headEnd type="none" w="med" len="med"/>
+                      <a:tailEnd type="none" w="med" len="med"/>
+                    </a:lnB>
+                    <a:solidFill>
+                      <a:srgbClr val="2E2B25"/>
+                    </a:solidFill>
+                  </a:tcPr>
+                </a:tc>
+              </a:tr>
+            </a:tbl>
+          </a:graphicData>
+        </a:graphic>
+      </p:graphicFrame>
+      <p:sp>
+        <p:nvSpPr>
+          <p:cNvPr id="5" name="Text 2"/>
+          <p:cNvSpPr/>
+          <p:nvPr/>
+        </p:nvSpPr>
+        <p:spPr>
+          <a:xfrm>
+            <a:off x="457200" y="6537960"/>
+            <a:ext cx="5486400" cy="274320"/>
+          </a:xfrm>
+          <a:prstGeom prst="rect">
+            <a:avLst/>
+          </a:prstGeom>
+          <a:noFill/>
+          <a:ln/>
+        </p:spPr>
+        <p:txBody>
+          <a:bodyPr wrap="square" lIns="0" tIns="0" rIns="0" bIns="0" rtlCol="0" anchor="ctr"/>
+          <a:lstStyle/>
+          <a:p>
+            <a:pPr indent="0" marL="0">
+              <a:buNone/>
+            </a:pPr>
+            <a:r>
+              <a:rPr lang="en-US" sz="800" dirty="0">
+                <a:solidFill>
+                  <a:srgbClr val="6F6B60"/>
+                </a:solidFill>
+                <a:latin typeface="Calibri" pitchFamily="34" charset="0"/>
+                <a:ea typeface="Calibri" pitchFamily="34" charset="-122"/>
+                <a:cs typeface="Calibri" pitchFamily="34" charset="-120"/>
+              </a:rPr>
+              <a:t>Bloombruh Research Toolkit — Taiwan Semiconductor Mfg. Co.</a:t>
+            </a:r>
+            <a:endParaRPr lang="en-US" sz="800" dirty="0"/>
+          </a:p>
+        </p:txBody>
+      </p:sp>
+      <p:sp>
+        <p:nvSpPr>
+          <p:cNvPr id="6" name="Text 3"/>
+          <p:cNvSpPr/>
+          <p:nvPr/>
+        </p:nvSpPr>
+        <p:spPr>
+          <a:xfrm>
+            <a:off x="11521440" y="6537960"/>
+            <a:ext cx="457200" cy="274320"/>
+          </a:xfrm>
+          <a:prstGeom prst="rect">
+            <a:avLst/>
+          </a:prstGeom>
+          <a:noFill/>
+          <a:ln/>
+        </p:spPr>
+        <p:txBody>
+          <a:bodyPr wrap="square" lIns="0" tIns="0" rIns="0" bIns="0" rtlCol="0" anchor="ctr"/>
+          <a:lstStyle/>
+          <a:p>
+            <a:pPr algn="r" indent="0" marL="0">
+              <a:buNone/>
+            </a:pPr>
+            <a:r>
+              <a:rPr lang="en-US" sz="800" dirty="0">
+                <a:solidFill>
+                  <a:srgbClr val="6F6B60"/>
+                </a:solidFill>
+                <a:latin typeface="Calibri" pitchFamily="34" charset="0"/>
+                <a:ea typeface="Calibri" pitchFamily="34" charset="-122"/>
+                <a:cs typeface="Calibri" pitchFamily="34" charset="-120"/>
+              </a:rPr>
+              <a:t>9</a:t>
             </a:r>
             <a:endParaRPr lang="en-US" sz="800" dirty="0"/>
           </a:p>
